--- a/data-eng/decks/w5d4s2.pptx
+++ b/data-eng/decks/w5d4s2.pptx
@@ -3100,7 +3100,7 @@
       <p:grpSpPr/>
       <p:sp>
         <p:nvSpPr>
-          <p:cNvPr id="2" name="Oval 1"/>
+          <p:cNvPr id="2" name="deckgen:decor"/>
           <p:cNvSpPr/>
           <p:nvPr/>
         </p:nvSpPr>
@@ -3130,7 +3130,7 @@
       </p:sp>
       <p:sp>
         <p:nvSpPr>
-          <p:cNvPr id="3" name="Oval 2"/>
+          <p:cNvPr id="3" name="deckgen:decor"/>
           <p:cNvSpPr/>
           <p:nvPr/>
         </p:nvSpPr>
@@ -3160,7 +3160,7 @@
       </p:sp>
       <p:sp>
         <p:nvSpPr>
-          <p:cNvPr id="4" name="Oval 3"/>
+          <p:cNvPr id="4" name="deckgen:decor"/>
           <p:cNvSpPr/>
           <p:nvPr/>
         </p:nvSpPr>
@@ -3190,7 +3190,7 @@
       </p:sp>
       <p:sp>
         <p:nvSpPr>
-          <p:cNvPr id="5" name="Rectangle 4"/>
+          <p:cNvPr id="5" name="deckgen:decor"/>
           <p:cNvSpPr/>
           <p:nvPr/>
         </p:nvSpPr>
@@ -3220,7 +3220,7 @@
       </p:sp>
       <p:sp>
         <p:nvSpPr>
-          <p:cNvPr id="6" name="Oval 5"/>
+          <p:cNvPr id="6" name="deckgen:decor"/>
           <p:cNvSpPr/>
           <p:nvPr/>
         </p:nvSpPr>
@@ -3250,7 +3250,7 @@
       </p:sp>
       <p:sp>
         <p:nvSpPr>
-          <p:cNvPr id="7" name="Oval 6"/>
+          <p:cNvPr id="7" name="deckgen:decor"/>
           <p:cNvSpPr/>
           <p:nvPr/>
         </p:nvSpPr>
@@ -3280,7 +3280,7 @@
       </p:sp>
       <p:sp>
         <p:nvSpPr>
-          <p:cNvPr id="8" name="Oval 7"/>
+          <p:cNvPr id="8" name="deckgen:decor"/>
           <p:cNvSpPr/>
           <p:nvPr/>
         </p:nvSpPr>
@@ -3310,7 +3310,7 @@
       </p:sp>
       <p:sp>
         <p:nvSpPr>
-          <p:cNvPr id="9" name="Oval 8"/>
+          <p:cNvPr id="9" name="deckgen:decor"/>
           <p:cNvSpPr/>
           <p:nvPr/>
         </p:nvSpPr>
@@ -3340,7 +3340,7 @@
       </p:sp>
       <p:sp>
         <p:nvSpPr>
-          <p:cNvPr id="10" name="Rectangle 9"/>
+          <p:cNvPr id="10" name="deckgen:decor"/>
           <p:cNvSpPr/>
           <p:nvPr/>
         </p:nvSpPr>
@@ -3600,7 +3600,7 @@
       <p:grpSpPr/>
       <p:sp>
         <p:nvSpPr>
-          <p:cNvPr id="2" name="Oval 1"/>
+          <p:cNvPr id="2" name="deckgen:decor"/>
           <p:cNvSpPr/>
           <p:nvPr/>
         </p:nvSpPr>
@@ -3630,7 +3630,7 @@
       </p:sp>
       <p:sp>
         <p:nvSpPr>
-          <p:cNvPr id="3" name="Oval 2"/>
+          <p:cNvPr id="3" name="deckgen:decor"/>
           <p:cNvSpPr/>
           <p:nvPr/>
         </p:nvSpPr>
@@ -3660,7 +3660,7 @@
       </p:sp>
       <p:sp>
         <p:nvSpPr>
-          <p:cNvPr id="4" name="Oval 3"/>
+          <p:cNvPr id="4" name="deckgen:decor"/>
           <p:cNvSpPr/>
           <p:nvPr/>
         </p:nvSpPr>
@@ -3941,7 +3941,7 @@
                 <a:ea typeface="Pretendard"/>
                 <a:cs typeface="Pretendard"/>
               </a:rPr>
-              <a:t>orders 5행 · products 3행이 스키마와 함께 출력된다</a:t>
+              <a:t>0 artifacts copied 뒤 &gt;&gt;&gt; · order_date 가 date 다</a:t>
             </a:r>
           </a:p>
         </p:txBody>
@@ -4087,7 +4087,7 @@
                 <a:ea typeface="Pretendard"/>
                 <a:cs typeface="Pretendard"/>
               </a:rPr>
-              <a:t>printSchema() 에서 order_date 가 date 다</a:t>
+              <a:t>조인 전후 5 = 5 · products 키 고유성 3 = 3</a:t>
             </a:r>
           </a:p>
         </p:txBody>
@@ -4233,7 +4233,7 @@
                 <a:ea typeface="Pretendard"/>
                 <a:cs typeface="Pretendard"/>
               </a:rPr>
-              <a:t>조인 전후 행 수가 5 = 5 · products 키 고유성 3 = 3</a:t>
+              <a:t>AMBIGUOUS_REFERENCE · UNRESOLVED_COLUMN 을 직접 봤다</a:t>
             </a:r>
           </a:p>
         </p:txBody>
@@ -4379,7 +4379,7 @@
                 <a:ea typeface="Pretendard"/>
                 <a:cs typeface="Pretendard"/>
               </a:rPr>
-              <a:t>10만 이상 필터에 P001 5개 225,000 · P003 3개 930,000 이 남는다</a:t>
+              <a:t>big 정확히 2행 · 상품별 합계 monitor · keyboard · mouse 순</a:t>
             </a:r>
           </a:p>
         </p:txBody>
@@ -4525,7 +4525,7 @@
                 <a:ea typeface="Pretendard"/>
                 <a:cs typeface="Pretendard"/>
               </a:rPr>
-              <a:t>상품별 합계가 monitor · keyboard · mouse 순이다</a:t>
+              <a:t>날짜별 1위 세 행 · 08-24 keyboard 90000 부터</a:t>
             </a:r>
           </a:p>
         </p:txBody>
@@ -4671,7 +4671,7 @@
                 <a:ea typeface="Pretendard"/>
                 <a:cs typeface="Pretendard"/>
               </a:rPr>
-              <a:t>explain() 에 BroadcastHashJoin 과 Exchange 가 보인다</a:t>
+              <a:t>SortMergeJoin · Exchange 넷 → broadcast 힌트로 BroadcastHashJoin</a:t>
             </a:r>
           </a:p>
         </p:txBody>
@@ -4808,7 +4808,7 @@
       <p:grpSpPr/>
       <p:sp>
         <p:nvSpPr>
-          <p:cNvPr id="2" name="Oval 1"/>
+          <p:cNvPr id="2" name="deckgen:decor"/>
           <p:cNvSpPr/>
           <p:nvPr/>
         </p:nvSpPr>
@@ -4838,7 +4838,7 @@
       </p:sp>
       <p:sp>
         <p:nvSpPr>
-          <p:cNvPr id="3" name="Oval 2"/>
+          <p:cNvPr id="3" name="deckgen:decor"/>
           <p:cNvSpPr/>
           <p:nvPr/>
         </p:nvSpPr>
@@ -5246,7 +5246,7 @@
                 <a:ea typeface="Pretendard"/>
                 <a:cs typeface="Pretendard"/>
               </a:rPr>
-              <a:t>SQL 로 같은 집계 — 결과 대조</a:t>
+              <a:t>SHOW VIEWS IN default 로 확인</a:t>
             </a:r>
           </a:p>
         </p:txBody>
@@ -5362,7 +5362,7 @@
                 <a:ea typeface="Pretendard"/>
                 <a:cs typeface="Pretendard"/>
               </a:rPr>
-              <a:t>explain() 둘을 나란히</a:t>
+              <a:t>SQL 로 같은 집계 — 결과 대조</a:t>
             </a:r>
           </a:p>
         </p:txBody>
@@ -5478,7 +5478,7 @@
                 <a:ea typeface="Pretendard"/>
                 <a:cs typeface="Pretendard"/>
               </a:rPr>
-              <a:t>writeTo("lake.db.product_sales")</a:t>
+              <a:t>lake.db.product_sales 로 저장</a:t>
             </a:r>
           </a:p>
         </p:txBody>
@@ -5590,7 +5590,7 @@
                 <a:ea typeface="Pretendard"/>
                 <a:cs typeface="Pretendard"/>
               </a:rPr>
-              <a:t>셸 그대로 · sales · with_amount 변수</a:t>
+              <a:t>셸 그대로 · sales · with_amount</a:t>
             </a:r>
           </a:p>
         </p:txBody>
@@ -5615,7 +5615,7 @@
       <p:grpSpPr/>
       <p:sp>
         <p:nvSpPr>
-          <p:cNvPr id="2" name="Oval 1"/>
+          <p:cNvPr id="2" name="deckgen:decor"/>
           <p:cNvSpPr/>
           <p:nvPr/>
         </p:nvSpPr>
@@ -5645,7 +5645,7 @@
       </p:sp>
       <p:sp>
         <p:nvSpPr>
-          <p:cNvPr id="3" name="Oval 2"/>
+          <p:cNvPr id="3" name="deckgen:decor"/>
           <p:cNvSpPr/>
           <p:nvPr/>
         </p:nvSpPr>
@@ -5675,7 +5675,7 @@
       </p:sp>
       <p:sp>
         <p:nvSpPr>
-          <p:cNvPr id="4" name="Oval 3"/>
+          <p:cNvPr id="4" name="deckgen:decor"/>
           <p:cNvSpPr/>
           <p:nvPr/>
         </p:nvSpPr>
@@ -5956,7 +5956,7 @@
                 <a:ea typeface="Pretendard"/>
                 <a:cs typeface="Pretendard"/>
               </a:rPr>
-              <a:t>orders·products 두 DataFrame 을 만들고 order_date 를 date 로 바꾼다</a:t>
+              <a:t>orders·products 를 만들고 order_date 를 date 로 바꾼다</a:t>
             </a:r>
           </a:p>
         </p:txBody>
@@ -6248,7 +6248,7 @@
                 <a:ea typeface="Pretendard"/>
                 <a:cs typeface="Pretendard"/>
               </a:rPr>
-              <a:t>조인 전후 행 수와 오른쪽 키 고유성을 직접 확인한다</a:t>
+              <a:t>ambiguous · cannot resolve 두 오류를 직접 내고 고친다</a:t>
             </a:r>
           </a:p>
         </p:txBody>
@@ -6394,7 +6394,7 @@
                 <a:ea typeface="Pretendard"/>
                 <a:cs typeface="Pretendard"/>
               </a:rPr>
-              <a:t>윈도 함수로 날짜별 1위를 뽑고 explain() 에서 조인 방식을 읽는다</a:t>
+              <a:t>윈도로 날짜별 1위를 뽑고 explain() 에서 조인 방식을 읽는다</a:t>
             </a:r>
           </a:p>
         </p:txBody>
@@ -6469,7 +6469,7 @@
                 <a:ea typeface="Pretendard"/>
                 <a:cs typeface="Pretendard"/>
               </a:rPr>
-              <a:t>5-3 셸 옵션 그대로 PySpark 를 띄웁니다 — 옵션이 길면 스크립트로 저장해 두세요</a:t>
+              <a:t>cd ~/data-eng/week5 → bash lake-pyspark.sh 로 셸을 띄웁니다 — 이후는 &gt;&gt;&gt; 안</a:t>
             </a:r>
           </a:p>
         </p:txBody>
@@ -6606,7 +6606,7 @@
       <p:grpSpPr/>
       <p:sp>
         <p:nvSpPr>
-          <p:cNvPr id="2" name="Oval 1"/>
+          <p:cNvPr id="2" name="deckgen:decor"/>
           <p:cNvSpPr/>
           <p:nvPr/>
         </p:nvSpPr>
@@ -6636,7 +6636,7 @@
       </p:sp>
       <p:sp>
         <p:nvSpPr>
-          <p:cNvPr id="3" name="Oval 2"/>
+          <p:cNvPr id="3" name="deckgen:decor"/>
           <p:cNvSpPr/>
           <p:nvPr/>
         </p:nvSpPr>
@@ -6666,7 +6666,7 @@
       </p:sp>
       <p:sp>
         <p:nvSpPr>
-          <p:cNvPr id="4" name="Oval 3"/>
+          <p:cNvPr id="4" name="deckgen:decor"/>
           <p:cNvSpPr/>
           <p:nvPr/>
         </p:nvSpPr>
@@ -6771,7 +6771,7 @@
                 <a:ea typeface="Pretendard"/>
                 <a:cs typeface="Pretendard"/>
               </a:rPr>
-              <a:t>일곱 단계 — 표 두 개에서 실행 계획까지</a:t>
+              <a:t>여덟 단계 — 표 두 개에서 실행 계획까지</a:t>
             </a:r>
           </a:p>
         </p:txBody>
@@ -6947,7 +6947,7 @@
                 <a:ea typeface="Pretendard"/>
                 <a:cs typeface="Pretendard"/>
               </a:rPr>
-              <a:t>1. 데이터</a:t>
+              <a:t>1·2. 셸·타입</a:t>
             </a:r>
           </a:p>
         </p:txBody>
@@ -6988,7 +6988,7 @@
                 <a:ea typeface="Pretendard"/>
                 <a:cs typeface="Pretendard"/>
               </a:rPr>
-              <a:t>orders 5행</a:t>
+              <a:t>5행·3행</a:t>
             </a:r>
           </a:p>
           <a:p>
@@ -7006,7 +7006,7 @@
                 <a:ea typeface="Pretendard"/>
                 <a:cs typeface="Pretendard"/>
               </a:rPr>
-              <a:t>products 3행</a:t>
+              <a:t>to_date</a:t>
             </a:r>
           </a:p>
         </p:txBody>
@@ -7111,7 +7111,7 @@
                 <a:ea typeface="Pretendard"/>
                 <a:cs typeface="Pretendard"/>
               </a:rPr>
-              <a:t>2. 타입</a:t>
+              <a:t>3. 조인</a:t>
             </a:r>
           </a:p>
         </p:txBody>
@@ -7152,7 +7152,25 @@
                 <a:ea typeface="Pretendard"/>
                 <a:cs typeface="Pretendard"/>
               </a:rPr>
-              <a:t>to_date</a:t>
+              <a:t>5행 → 5행</a:t>
+            </a:r>
+          </a:p>
+          <a:p>
+            <a:pPr algn="ctr">
+              <a:lnSpc>
+                <a:spcPct val="146000"/>
+              </a:lnSpc>
+            </a:pPr>
+            <a:r>
+              <a:rPr sz="2100" b="0">
+                <a:solidFill>
+                  <a:srgbClr val="3D3D3D"/>
+                </a:solidFill>
+                <a:latin typeface="Pretendard"/>
+                <a:ea typeface="Pretendard"/>
+                <a:cs typeface="Pretendard"/>
+              </a:rPr>
+              <a:t>amount 파생</a:t>
             </a:r>
           </a:p>
         </p:txBody>
@@ -7257,7 +7275,7 @@
                 <a:ea typeface="Pretendard"/>
                 <a:cs typeface="Pretendard"/>
               </a:rPr>
-              <a:t>3·4. 조인·필터</a:t>
+              <a:t>4. 일부러 실패</a:t>
             </a:r>
           </a:p>
         </p:txBody>
@@ -7298,7 +7316,7 @@
                 <a:ea typeface="Pretendard"/>
                 <a:cs typeface="Pretendard"/>
               </a:rPr>
-              <a:t>amount 파생</a:t>
+              <a:t>ambiguous</a:t>
             </a:r>
           </a:p>
           <a:p>
@@ -7316,7 +7334,7 @@
                 <a:ea typeface="Pretendard"/>
                 <a:cs typeface="Pretendard"/>
               </a:rPr>
-              <a:t>10만 이상</a:t>
+              <a:t>cannot resolve</a:t>
             </a:r>
           </a:p>
         </p:txBody>
@@ -7421,7 +7439,7 @@
                 <a:ea typeface="Pretendard"/>
                 <a:cs typeface="Pretendard"/>
               </a:rPr>
-              <a:t>5·6. 집계·윈도</a:t>
+              <a:t>5·6. 필터·집계</a:t>
             </a:r>
           </a:p>
         </p:txBody>
@@ -7462,25 +7480,25 @@
                 <a:ea typeface="Pretendard"/>
                 <a:cs typeface="Pretendard"/>
               </a:rPr>
+              <a:t>big 2행</a:t>
+            </a:r>
+          </a:p>
+          <a:p>
+            <a:pPr algn="ctr">
+              <a:lnSpc>
+                <a:spcPct val="146000"/>
+              </a:lnSpc>
+            </a:pPr>
+            <a:r>
+              <a:rPr sz="2100" b="0">
+                <a:solidFill>
+                  <a:srgbClr val="3D3D3D"/>
+                </a:solidFill>
+                <a:latin typeface="Pretendard"/>
+                <a:ea typeface="Pretendard"/>
+                <a:cs typeface="Pretendard"/>
+              </a:rPr>
               <a:t>groupBy</a:t>
-            </a:r>
-          </a:p>
-          <a:p>
-            <a:pPr algn="ctr">
-              <a:lnSpc>
-                <a:spcPct val="146000"/>
-              </a:lnSpc>
-            </a:pPr>
-            <a:r>
-              <a:rPr sz="2100" b="0">
-                <a:solidFill>
-                  <a:srgbClr val="3D3D3D"/>
-                </a:solidFill>
-                <a:latin typeface="Pretendard"/>
-                <a:ea typeface="Pretendard"/>
-                <a:cs typeface="Pretendard"/>
-              </a:rPr>
-              <a:t>row_number</a:t>
             </a:r>
           </a:p>
         </p:txBody>
@@ -7585,7 +7603,7 @@
                 <a:ea typeface="Pretendard"/>
                 <a:cs typeface="Pretendard"/>
               </a:rPr>
-              <a:t>7. 계획</a:t>
+              <a:t>7·8. 윈도·계획</a:t>
             </a:r>
           </a:p>
         </p:txBody>
@@ -7611,6 +7629,24 @@
             <a:spAutoFit/>
           </a:bodyPr>
           <a:lstStyle/>
+          <a:p>
+            <a:pPr algn="ctr">
+              <a:lnSpc>
+                <a:spcPct val="146000"/>
+              </a:lnSpc>
+            </a:pPr>
+            <a:r>
+              <a:rPr sz="2100" b="0">
+                <a:solidFill>
+                  <a:srgbClr val="3D3D3D"/>
+                </a:solidFill>
+                <a:latin typeface="Pretendard"/>
+                <a:ea typeface="Pretendard"/>
+                <a:cs typeface="Pretendard"/>
+              </a:rPr>
+              <a:t>row_number</a:t>
+            </a:r>
+          </a:p>
           <a:p>
             <a:pPr algn="ctr">
               <a:lnSpc>
@@ -7763,7 +7799,7 @@
       <p:grpSpPr/>
       <p:sp>
         <p:nvSpPr>
-          <p:cNvPr id="2" name="Oval 1"/>
+          <p:cNvPr id="2" name="deckgen:decor"/>
           <p:cNvSpPr/>
           <p:nvPr/>
         </p:nvSpPr>
@@ -7793,7 +7829,7 @@
       </p:sp>
       <p:sp>
         <p:nvSpPr>
-          <p:cNvPr id="3" name="Oval 2"/>
+          <p:cNvPr id="3" name="deckgen:decor"/>
           <p:cNvSpPr/>
           <p:nvPr/>
         </p:nvSpPr>
@@ -7823,7 +7859,7 @@
       </p:sp>
       <p:sp>
         <p:nvSpPr>
-          <p:cNvPr id="4" name="Oval 3"/>
+          <p:cNvPr id="4" name="deckgen:decor"/>
           <p:cNvSpPr/>
           <p:nvPr/>
         </p:nvSpPr>
@@ -7928,7 +7964,7 @@
                 <a:ea typeface="Pretendard"/>
                 <a:cs typeface="Pretendard"/>
               </a:rPr>
-              <a:t>표 두 개를 만들고 날짜 타입을 바로잡는다</a:t>
+              <a:t>셸을 띄우고 표 두 개 · 날짜 타입</a:t>
             </a:r>
           </a:p>
         </p:txBody>
@@ -8104,7 +8140,7 @@
                 <a:ea typeface="Pretendard"/>
                 <a:cs typeface="Pretendard"/>
               </a:rPr>
-              <a:t>orders · products 를 createDataFrame 으로</a:t>
+              <a:t>bash lake-pyspark.sh</a:t>
             </a:r>
           </a:p>
         </p:txBody>
@@ -8145,7 +8181,7 @@
                 <a:ea typeface="Pretendard"/>
                 <a:cs typeface="Pretendard"/>
               </a:rPr>
-              <a:t>orders 5행(order_id·product_id·qty·order_date) · products 3행(product_id·name·price)</a:t>
+              <a:t>「0 artifacts copied, 4 already retrieved」 — 10~20초 뒤 &gt;&gt;&gt;</a:t>
             </a:r>
           </a:p>
         </p:txBody>
@@ -8291,7 +8327,7 @@
                 <a:ea typeface="Pretendard"/>
                 <a:cs typeface="Pretendard"/>
               </a:rPr>
-              <a:t>show() · printSchema() 로 확인</a:t>
+              <a:t>createDataFrame 으로 orders · products</a:t>
             </a:r>
           </a:p>
         </p:txBody>
@@ -8332,7 +8368,7 @@
                 <a:ea typeface="Pretendard"/>
                 <a:cs typeface="Pretendard"/>
               </a:rPr>
-              <a:t>order_date 가 string — 3-1 에서 겪은 것과 같은 상황</a:t>
+              <a:t>orders 5행 · products 3행 — printSchema() 에 order_date: string</a:t>
             </a:r>
           </a:p>
         </p:txBody>
@@ -8478,7 +8514,7 @@
                 <a:ea typeface="Pretendard"/>
                 <a:cs typeface="Pretendard"/>
               </a:rPr>
-              <a:t>F.to_date("order_date") 로 바꾼다</a:t>
+              <a:t>F.to_date("order_date") 로 덮어쓰기</a:t>
             </a:r>
           </a:p>
         </p:txBody>
@@ -8519,7 +8555,7 @@
                 <a:ea typeface="Pretendard"/>
                 <a:cs typeface="Pretendard"/>
               </a:rPr>
-              <a:t>withColumn 으로 덮어쓰고 printSchema() 에 date 가 보이면 통과</a:t>
+              <a:t>withColumn 뒤 printSchema() 에 order_date: date 면 통과</a:t>
             </a:r>
           </a:p>
         </p:txBody>
@@ -8724,7 +8760,7 @@
                 <a:ea typeface="Pretendard"/>
                 <a:cs typeface="Pretendard"/>
               </a:rPr>
-              <a:t>from pyspark.sql import functions as F — 날짜는 반드시 변환 후 사용(3주차)</a:t>
+              <a:t>Windows(WSL2) 분 — 0 artifacts copied 가 나왔나요, jar 를 다시 받았나요?</a:t>
             </a:r>
           </a:p>
         </p:txBody>
@@ -8861,7 +8897,7 @@
       <p:grpSpPr/>
       <p:sp>
         <p:nvSpPr>
-          <p:cNvPr id="2" name="Oval 1"/>
+          <p:cNvPr id="2" name="deckgen:decor"/>
           <p:cNvSpPr/>
           <p:nvPr/>
         </p:nvSpPr>
@@ -8891,7 +8927,7 @@
       </p:sp>
       <p:sp>
         <p:nvSpPr>
-          <p:cNvPr id="3" name="Oval 2"/>
+          <p:cNvPr id="3" name="deckgen:decor"/>
           <p:cNvSpPr/>
           <p:nvPr/>
         </p:nvSpPr>
@@ -8921,7 +8957,7 @@
       </p:sp>
       <p:sp>
         <p:nvSpPr>
-          <p:cNvPr id="4" name="Oval 3"/>
+          <p:cNvPr id="4" name="deckgen:decor"/>
           <p:cNvSpPr/>
           <p:nvPr/>
         </p:nvSpPr>
@@ -8985,7 +9021,7 @@
                 <a:ea typeface="Pretendard"/>
                 <a:cs typeface="Pretendard"/>
               </a:rPr>
-              <a:t>3~5단계</a:t>
+              <a:t>3단계</a:t>
             </a:r>
           </a:p>
         </p:txBody>
@@ -9026,7 +9062,7 @@
                 <a:ea typeface="Pretendard"/>
                 <a:cs typeface="Pretendard"/>
               </a:rPr>
-              <a:t>조인 · 파생 · 필터 · 집계 — 핵심 줄</a:t>
+              <a:t>조인하고 amount 를 만든다 — 5행 → 5행</a:t>
             </a:r>
           </a:p>
         </p:txBody>
@@ -9063,88 +9099,19 @@
       </p:sp>
       <p:sp>
         <p:nvSpPr>
-          <p:cNvPr id="8" name="Rectangle 7"/>
+          <p:cNvPr id="8" name="Rounded Rectangle 7"/>
           <p:cNvSpPr/>
           <p:nvPr/>
         </p:nvSpPr>
         <p:spPr>
           <a:xfrm>
-            <a:off x="1143000" y="2781300"/>
-            <a:ext cx="1185827" cy="571500"/>
-          </a:xfrm>
-          <a:prstGeom prst="rect">
-            <a:avLst/>
-          </a:prstGeom>
-          <a:solidFill>
-            <a:srgbClr val="0D2B5E"/>
-          </a:solidFill>
-          <a:ln>
-            <a:noFill/>
-          </a:ln>
-          <a:effectLst/>
-        </p:spPr>
-        <p:txBody>
-          <a:bodyPr rtlCol="0" anchor="ctr" wrap="square"/>
-          <a:lstStyle/>
-          <a:p>
-            <a:pPr algn="ctr"/>
-          </a:p>
-        </p:txBody>
-      </p:sp>
-      <p:sp>
-        <p:nvSpPr>
-          <p:cNvPr id="9" name="TextBox 8"/>
-          <p:cNvSpPr txBox="1"/>
-          <p:nvPr/>
-        </p:nvSpPr>
-        <p:spPr>
-          <a:xfrm>
-            <a:off x="1143000" y="2781300"/>
-            <a:ext cx="1185827" cy="571500"/>
-          </a:xfrm>
-          <a:prstGeom prst="rect">
-            <a:avLst/>
-          </a:prstGeom>
-          <a:noFill/>
-        </p:spPr>
-        <p:txBody>
-          <a:bodyPr wrap="square" lIns="0" rIns="0" tIns="0" bIns="0" anchor="ctr">
-            <a:spAutoFit/>
-          </a:bodyPr>
-          <a:lstStyle/>
-          <a:p>
-            <a:pPr algn="ctr">
-              <a:lnSpc>
-                <a:spcPct val="100000"/>
-              </a:lnSpc>
-            </a:pPr>
-            <a:r>
-              <a:rPr sz="1800" b="1">
-                <a:solidFill>
-                  <a:srgbClr val="FFFFFF"/>
-                </a:solidFill>
-                <a:latin typeface="Pretendard"/>
-                <a:ea typeface="Pretendard"/>
-                <a:cs typeface="Pretendard"/>
-              </a:rPr>
-              <a:t>조인</a:t>
-            </a:r>
-          </a:p>
-        </p:txBody>
-      </p:sp>
-      <p:sp>
-        <p:nvSpPr>
-          <p:cNvPr id="10" name="Rectangle 9"/>
-          <p:cNvSpPr/>
-          <p:nvPr/>
-        </p:nvSpPr>
-        <p:spPr>
-          <a:xfrm>
-            <a:off x="2328827" y="2781300"/>
-            <a:ext cx="14816173" cy="571500"/>
-          </a:xfrm>
-          <a:prstGeom prst="rect">
-            <a:avLst/>
+            <a:off x="1143000" y="2933700"/>
+            <a:ext cx="11430000" cy="1095375"/>
+          </a:xfrm>
+          <a:prstGeom prst="roundRect">
+            <a:avLst>
+              <a:gd name="adj" fmla="val 4347"/>
+            </a:avLst>
           </a:prstGeom>
           <a:solidFill>
             <a:srgbClr val="FAFBFD"/>
@@ -9166,57 +9133,16 @@
       </p:sp>
       <p:sp>
         <p:nvSpPr>
-          <p:cNvPr id="11" name="TextBox 10"/>
-          <p:cNvSpPr txBox="1"/>
-          <p:nvPr/>
-        </p:nvSpPr>
-        <p:spPr>
-          <a:xfrm>
-            <a:off x="2481227" y="2781300"/>
-            <a:ext cx="14511373" cy="571500"/>
-          </a:xfrm>
-          <a:prstGeom prst="rect">
-            <a:avLst/>
-          </a:prstGeom>
-          <a:noFill/>
-        </p:spPr>
-        <p:txBody>
-          <a:bodyPr wrap="square" lIns="0" rIns="0" tIns="0" bIns="0" anchor="ctr">
-            <a:spAutoFit/>
-          </a:bodyPr>
-          <a:lstStyle/>
-          <a:p>
-            <a:pPr algn="l">
-              <a:lnSpc>
-                <a:spcPct val="115000"/>
-              </a:lnSpc>
-            </a:pPr>
-            <a:r>
-              <a:rPr sz="1800" b="0">
-                <a:solidFill>
-                  <a:srgbClr val="3D3D3D"/>
-                </a:solidFill>
-                <a:latin typeface="Pretendard"/>
-                <a:ea typeface="Pretendard"/>
-                <a:cs typeface="Pretendard"/>
-              </a:rPr>
-              <a:t>orders.join(products, on="product_id", how="inner")</a:t>
-            </a:r>
-          </a:p>
-        </p:txBody>
-      </p:sp>
-      <p:sp>
-        <p:nvSpPr>
-          <p:cNvPr id="12" name="Rectangle 11"/>
+          <p:cNvPr id="9" name="Oval 8"/>
           <p:cNvSpPr/>
           <p:nvPr/>
         </p:nvSpPr>
         <p:spPr>
           <a:xfrm>
-            <a:off x="1143000" y="3429000"/>
-            <a:ext cx="1185827" cy="571500"/>
-          </a:xfrm>
-          <a:prstGeom prst="rect">
+            <a:off x="1447800" y="3181350"/>
+            <a:ext cx="590550" cy="590550"/>
+          </a:xfrm>
+          <a:prstGeom prst="ellipse">
             <a:avLst/>
           </a:prstGeom>
           <a:solidFill>
@@ -9237,22 +9163,22 @@
       </p:sp>
       <p:sp>
         <p:nvSpPr>
-          <p:cNvPr id="13" name="TextBox 12"/>
-          <p:cNvSpPr txBox="1"/>
-          <p:nvPr/>
-        </p:nvSpPr>
-        <p:spPr>
-          <a:xfrm>
-            <a:off x="1143000" y="3429000"/>
-            <a:ext cx="1185827" cy="571500"/>
-          </a:xfrm>
-          <a:prstGeom prst="rect">
-            <a:avLst/>
-          </a:prstGeom>
-          <a:noFill/>
-        </p:spPr>
-        <p:txBody>
-          <a:bodyPr wrap="square" lIns="0" rIns="0" tIns="0" bIns="0" anchor="ctr">
+          <p:cNvPr id="10" name="TextBox 9"/>
+          <p:cNvSpPr txBox="1"/>
+          <p:nvPr/>
+        </p:nvSpPr>
+        <p:spPr>
+          <a:xfrm>
+            <a:off x="1447800" y="3333750"/>
+            <a:ext cx="590550" cy="323850"/>
+          </a:xfrm>
+          <a:prstGeom prst="rect">
+            <a:avLst/>
+          </a:prstGeom>
+          <a:noFill/>
+        </p:spPr>
+        <p:txBody>
+          <a:bodyPr wrap="square" lIns="0" rIns="0" tIns="0" bIns="0" anchor="t">
             <a:spAutoFit/>
           </a:bodyPr>
           <a:lstStyle/>
@@ -9263,7 +9189,7 @@
               </a:lnSpc>
             </a:pPr>
             <a:r>
-              <a:rPr sz="1800" b="1">
+              <a:rPr sz="2250" b="1">
                 <a:solidFill>
                   <a:srgbClr val="FFFFFF"/>
                 </a:solidFill>
@@ -9271,24 +9197,108 @@
                 <a:ea typeface="Pretendard"/>
                 <a:cs typeface="Pretendard"/>
               </a:rPr>
-              <a:t>파생</a:t>
-            </a:r>
-          </a:p>
-        </p:txBody>
-      </p:sp>
-      <p:sp>
-        <p:nvSpPr>
-          <p:cNvPr id="14" name="Rectangle 13"/>
+              <a:t>1</a:t>
+            </a:r>
+          </a:p>
+        </p:txBody>
+      </p:sp>
+      <p:sp>
+        <p:nvSpPr>
+          <p:cNvPr id="11" name="TextBox 10"/>
+          <p:cNvSpPr txBox="1"/>
+          <p:nvPr/>
+        </p:nvSpPr>
+        <p:spPr>
+          <a:xfrm>
+            <a:off x="2324100" y="3143250"/>
+            <a:ext cx="9906000" cy="400050"/>
+          </a:xfrm>
+          <a:prstGeom prst="rect">
+            <a:avLst/>
+          </a:prstGeom>
+          <a:noFill/>
+        </p:spPr>
+        <p:txBody>
+          <a:bodyPr wrap="square" lIns="0" rIns="0" tIns="0" bIns="0" anchor="t">
+            <a:spAutoFit/>
+          </a:bodyPr>
+          <a:lstStyle/>
+          <a:p>
+            <a:pPr algn="l">
+              <a:lnSpc>
+                <a:spcPct val="110000"/>
+              </a:lnSpc>
+            </a:pPr>
+            <a:r>
+              <a:rPr sz="2475" b="1">
+                <a:solidFill>
+                  <a:srgbClr val="0D2B5E"/>
+                </a:solidFill>
+                <a:latin typeface="Pretendard"/>
+                <a:ea typeface="Pretendard"/>
+                <a:cs typeface="Pretendard"/>
+              </a:rPr>
+              <a:t>orders.join(products, on="product_id", how="inner")</a:t>
+            </a:r>
+          </a:p>
+        </p:txBody>
+      </p:sp>
+      <p:sp>
+        <p:nvSpPr>
+          <p:cNvPr id="12" name="TextBox 11"/>
+          <p:cNvSpPr txBox="1"/>
+          <p:nvPr/>
+        </p:nvSpPr>
+        <p:spPr>
+          <a:xfrm>
+            <a:off x="2324100" y="3543300"/>
+            <a:ext cx="9906000" cy="361950"/>
+          </a:xfrm>
+          <a:prstGeom prst="rect">
+            <a:avLst/>
+          </a:prstGeom>
+          <a:noFill/>
+        </p:spPr>
+        <p:txBody>
+          <a:bodyPr wrap="square" lIns="0" rIns="0" tIns="0" bIns="0" anchor="t">
+            <a:spAutoFit/>
+          </a:bodyPr>
+          <a:lstStyle/>
+          <a:p>
+            <a:pPr algn="l">
+              <a:lnSpc>
+                <a:spcPct val="120000"/>
+              </a:lnSpc>
+            </a:pPr>
+            <a:r>
+              <a:rPr sz="2025" b="0">
+                <a:solidFill>
+                  <a:srgbClr val="3D3D3D"/>
+                </a:solidFill>
+                <a:latin typeface="Pretendard"/>
+                <a:ea typeface="Pretendard"/>
+                <a:cs typeface="Pretendard"/>
+              </a:rPr>
+              <a:t>「조인 전: 5 행 / 조인 후: 5 행」 · product_id 칸은 하나만</a:t>
+            </a:r>
+          </a:p>
+        </p:txBody>
+      </p:sp>
+      <p:sp>
+        <p:nvSpPr>
+          <p:cNvPr id="13" name="Rounded Rectangle 12"/>
           <p:cNvSpPr/>
           <p:nvPr/>
         </p:nvSpPr>
         <p:spPr>
           <a:xfrm>
-            <a:off x="2328827" y="3429000"/>
-            <a:ext cx="14816173" cy="571500"/>
-          </a:xfrm>
-          <a:prstGeom prst="rect">
-            <a:avLst/>
+            <a:off x="1143000" y="4200525"/>
+            <a:ext cx="11430000" cy="1095375"/>
+          </a:xfrm>
+          <a:prstGeom prst="roundRect">
+            <a:avLst>
+              <a:gd name="adj" fmla="val 4347"/>
+            </a:avLst>
           </a:prstGeom>
           <a:solidFill>
             <a:srgbClr val="FAFBFD"/>
@@ -9310,57 +9320,16 @@
       </p:sp>
       <p:sp>
         <p:nvSpPr>
-          <p:cNvPr id="15" name="TextBox 14"/>
-          <p:cNvSpPr txBox="1"/>
-          <p:nvPr/>
-        </p:nvSpPr>
-        <p:spPr>
-          <a:xfrm>
-            <a:off x="2481227" y="3429000"/>
-            <a:ext cx="14511373" cy="571500"/>
-          </a:xfrm>
-          <a:prstGeom prst="rect">
-            <a:avLst/>
-          </a:prstGeom>
-          <a:noFill/>
-        </p:spPr>
-        <p:txBody>
-          <a:bodyPr wrap="square" lIns="0" rIns="0" tIns="0" bIns="0" anchor="ctr">
-            <a:spAutoFit/>
-          </a:bodyPr>
-          <a:lstStyle/>
-          <a:p>
-            <a:pPr algn="l">
-              <a:lnSpc>
-                <a:spcPct val="115000"/>
-              </a:lnSpc>
-            </a:pPr>
-            <a:r>
-              <a:rPr sz="1800" b="0">
-                <a:solidFill>
-                  <a:srgbClr val="3D3D3D"/>
-                </a:solidFill>
-                <a:latin typeface="Pretendard"/>
-                <a:ea typeface="Pretendard"/>
-                <a:cs typeface="Pretendard"/>
-              </a:rPr>
-              <a:t>withColumn("amount", F.col("qty") * F.col("price"))</a:t>
-            </a:r>
-          </a:p>
-        </p:txBody>
-      </p:sp>
-      <p:sp>
-        <p:nvSpPr>
-          <p:cNvPr id="16" name="Rectangle 15"/>
+          <p:cNvPr id="14" name="Oval 13"/>
           <p:cNvSpPr/>
           <p:nvPr/>
         </p:nvSpPr>
         <p:spPr>
           <a:xfrm>
-            <a:off x="1143000" y="4076700"/>
-            <a:ext cx="1185827" cy="571500"/>
-          </a:xfrm>
-          <a:prstGeom prst="rect">
+            <a:off x="1447800" y="4448175"/>
+            <a:ext cx="590550" cy="590550"/>
+          </a:xfrm>
+          <a:prstGeom prst="ellipse">
             <a:avLst/>
           </a:prstGeom>
           <a:solidFill>
@@ -9381,58 +9350,142 @@
       </p:sp>
       <p:sp>
         <p:nvSpPr>
+          <p:cNvPr id="15" name="TextBox 14"/>
+          <p:cNvSpPr txBox="1"/>
+          <p:nvPr/>
+        </p:nvSpPr>
+        <p:spPr>
+          <a:xfrm>
+            <a:off x="1447800" y="4600575"/>
+            <a:ext cx="590550" cy="323850"/>
+          </a:xfrm>
+          <a:prstGeom prst="rect">
+            <a:avLst/>
+          </a:prstGeom>
+          <a:noFill/>
+        </p:spPr>
+        <p:txBody>
+          <a:bodyPr wrap="square" lIns="0" rIns="0" tIns="0" bIns="0" anchor="t">
+            <a:spAutoFit/>
+          </a:bodyPr>
+          <a:lstStyle/>
+          <a:p>
+            <a:pPr algn="ctr">
+              <a:lnSpc>
+                <a:spcPct val="100000"/>
+              </a:lnSpc>
+            </a:pPr>
+            <a:r>
+              <a:rPr sz="2250" b="1">
+                <a:solidFill>
+                  <a:srgbClr val="FFFFFF"/>
+                </a:solidFill>
+                <a:latin typeface="Pretendard"/>
+                <a:ea typeface="Pretendard"/>
+                <a:cs typeface="Pretendard"/>
+              </a:rPr>
+              <a:t>2</a:t>
+            </a:r>
+          </a:p>
+        </p:txBody>
+      </p:sp>
+      <p:sp>
+        <p:nvSpPr>
+          <p:cNvPr id="16" name="TextBox 15"/>
+          <p:cNvSpPr txBox="1"/>
+          <p:nvPr/>
+        </p:nvSpPr>
+        <p:spPr>
+          <a:xfrm>
+            <a:off x="2324100" y="4410075"/>
+            <a:ext cx="9906000" cy="400050"/>
+          </a:xfrm>
+          <a:prstGeom prst="rect">
+            <a:avLst/>
+          </a:prstGeom>
+          <a:noFill/>
+        </p:spPr>
+        <p:txBody>
+          <a:bodyPr wrap="square" lIns="0" rIns="0" tIns="0" bIns="0" anchor="t">
+            <a:spAutoFit/>
+          </a:bodyPr>
+          <a:lstStyle/>
+          <a:p>
+            <a:pPr algn="l">
+              <a:lnSpc>
+                <a:spcPct val="110000"/>
+              </a:lnSpc>
+            </a:pPr>
+            <a:r>
+              <a:rPr sz="2475" b="1">
+                <a:solidFill>
+                  <a:srgbClr val="0D2B5E"/>
+                </a:solidFill>
+                <a:latin typeface="Pretendard"/>
+                <a:ea typeface="Pretendard"/>
+                <a:cs typeface="Pretendard"/>
+              </a:rPr>
+              <a:t>withColumn("amount", F.col("qty") * F.col("price"))</a:t>
+            </a:r>
+          </a:p>
+        </p:txBody>
+      </p:sp>
+      <p:sp>
+        <p:nvSpPr>
           <p:cNvPr id="17" name="TextBox 16"/>
           <p:cNvSpPr txBox="1"/>
           <p:nvPr/>
         </p:nvSpPr>
         <p:spPr>
           <a:xfrm>
-            <a:off x="1143000" y="4076700"/>
-            <a:ext cx="1185827" cy="571500"/>
-          </a:xfrm>
-          <a:prstGeom prst="rect">
-            <a:avLst/>
-          </a:prstGeom>
-          <a:noFill/>
-        </p:spPr>
-        <p:txBody>
-          <a:bodyPr wrap="square" lIns="0" rIns="0" tIns="0" bIns="0" anchor="ctr">
-            <a:spAutoFit/>
-          </a:bodyPr>
-          <a:lstStyle/>
-          <a:p>
-            <a:pPr algn="ctr">
-              <a:lnSpc>
-                <a:spcPct val="100000"/>
-              </a:lnSpc>
-            </a:pPr>
-            <a:r>
-              <a:rPr sz="1800" b="1">
-                <a:solidFill>
-                  <a:srgbClr val="FFFFFF"/>
-                </a:solidFill>
-                <a:latin typeface="Pretendard"/>
-                <a:ea typeface="Pretendard"/>
-                <a:cs typeface="Pretendard"/>
-              </a:rPr>
-              <a:t>필터</a:t>
-            </a:r>
-          </a:p>
-        </p:txBody>
-      </p:sp>
-      <p:sp>
-        <p:nvSpPr>
-          <p:cNvPr id="18" name="Rectangle 17"/>
+            <a:off x="2324100" y="4810125"/>
+            <a:ext cx="9906000" cy="361950"/>
+          </a:xfrm>
+          <a:prstGeom prst="rect">
+            <a:avLst/>
+          </a:prstGeom>
+          <a:noFill/>
+        </p:spPr>
+        <p:txBody>
+          <a:bodyPr wrap="square" lIns="0" rIns="0" tIns="0" bIns="0" anchor="t">
+            <a:spAutoFit/>
+          </a:bodyPr>
+          <a:lstStyle/>
+          <a:p>
+            <a:pPr algn="l">
+              <a:lnSpc>
+                <a:spcPct val="120000"/>
+              </a:lnSpc>
+            </a:pPr>
+            <a:r>
+              <a:rPr sz="2025" b="0">
+                <a:solidFill>
+                  <a:srgbClr val="3D3D3D"/>
+                </a:solidFill>
+                <a:latin typeface="Pretendard"/>
+                <a:ea typeface="Pretendard"/>
+                <a:cs typeface="Pretendard"/>
+              </a:rPr>
+              <a:t>225000 · 90000 · 46000 · 23000 · 930000 다섯 값(순서는 다를 수 있음)</a:t>
+            </a:r>
+          </a:p>
+        </p:txBody>
+      </p:sp>
+      <p:sp>
+        <p:nvSpPr>
+          <p:cNvPr id="18" name="Rounded Rectangle 17"/>
           <p:cNvSpPr/>
           <p:nvPr/>
         </p:nvSpPr>
         <p:spPr>
           <a:xfrm>
-            <a:off x="2328827" y="4076700"/>
-            <a:ext cx="14816173" cy="571500"/>
-          </a:xfrm>
-          <a:prstGeom prst="rect">
-            <a:avLst/>
+            <a:off x="1143000" y="5467350"/>
+            <a:ext cx="11430000" cy="1095375"/>
+          </a:xfrm>
+          <a:prstGeom prst="roundRect">
+            <a:avLst>
+              <a:gd name="adj" fmla="val 4347"/>
+            </a:avLst>
           </a:prstGeom>
           <a:solidFill>
             <a:srgbClr val="FAFBFD"/>
@@ -9454,57 +9507,16 @@
       </p:sp>
       <p:sp>
         <p:nvSpPr>
-          <p:cNvPr id="19" name="TextBox 18"/>
-          <p:cNvSpPr txBox="1"/>
-          <p:nvPr/>
-        </p:nvSpPr>
-        <p:spPr>
-          <a:xfrm>
-            <a:off x="2481227" y="4076700"/>
-            <a:ext cx="14511373" cy="571500"/>
-          </a:xfrm>
-          <a:prstGeom prst="rect">
-            <a:avLst/>
-          </a:prstGeom>
-          <a:noFill/>
-        </p:spPr>
-        <p:txBody>
-          <a:bodyPr wrap="square" lIns="0" rIns="0" tIns="0" bIns="0" anchor="ctr">
-            <a:spAutoFit/>
-          </a:bodyPr>
-          <a:lstStyle/>
-          <a:p>
-            <a:pPr algn="l">
-              <a:lnSpc>
-                <a:spcPct val="115000"/>
-              </a:lnSpc>
-            </a:pPr>
-            <a:r>
-              <a:rPr sz="1800" b="0">
-                <a:solidFill>
-                  <a:srgbClr val="3D3D3D"/>
-                </a:solidFill>
-                <a:latin typeface="Pretendard"/>
-                <a:ea typeface="Pretendard"/>
-                <a:cs typeface="Pretendard"/>
-              </a:rPr>
-              <a:t>filter(F.col("amount") &gt;= 100000)</a:t>
-            </a:r>
-          </a:p>
-        </p:txBody>
-      </p:sp>
-      <p:sp>
-        <p:nvSpPr>
-          <p:cNvPr id="20" name="Rectangle 19"/>
+          <p:cNvPr id="19" name="Oval 18"/>
           <p:cNvSpPr/>
           <p:nvPr/>
         </p:nvSpPr>
         <p:spPr>
           <a:xfrm>
-            <a:off x="1143000" y="4724400"/>
-            <a:ext cx="1185827" cy="571500"/>
-          </a:xfrm>
-          <a:prstGeom prst="rect">
+            <a:off x="1447800" y="5715000"/>
+            <a:ext cx="590550" cy="590550"/>
+          </a:xfrm>
+          <a:prstGeom prst="ellipse">
             <a:avLst/>
           </a:prstGeom>
           <a:solidFill>
@@ -9525,65 +9537,149 @@
       </p:sp>
       <p:sp>
         <p:nvSpPr>
+          <p:cNvPr id="20" name="TextBox 19"/>
+          <p:cNvSpPr txBox="1"/>
+          <p:nvPr/>
+        </p:nvSpPr>
+        <p:spPr>
+          <a:xfrm>
+            <a:off x="1447800" y="5867400"/>
+            <a:ext cx="590550" cy="323850"/>
+          </a:xfrm>
+          <a:prstGeom prst="rect">
+            <a:avLst/>
+          </a:prstGeom>
+          <a:noFill/>
+        </p:spPr>
+        <p:txBody>
+          <a:bodyPr wrap="square" lIns="0" rIns="0" tIns="0" bIns="0" anchor="t">
+            <a:spAutoFit/>
+          </a:bodyPr>
+          <a:lstStyle/>
+          <a:p>
+            <a:pPr algn="ctr">
+              <a:lnSpc>
+                <a:spcPct val="100000"/>
+              </a:lnSpc>
+            </a:pPr>
+            <a:r>
+              <a:rPr sz="2250" b="1">
+                <a:solidFill>
+                  <a:srgbClr val="FFFFFF"/>
+                </a:solidFill>
+                <a:latin typeface="Pretendard"/>
+                <a:ea typeface="Pretendard"/>
+                <a:cs typeface="Pretendard"/>
+              </a:rPr>
+              <a:t>3</a:t>
+            </a:r>
+          </a:p>
+        </p:txBody>
+      </p:sp>
+      <p:sp>
+        <p:nvSpPr>
           <p:cNvPr id="21" name="TextBox 20"/>
           <p:cNvSpPr txBox="1"/>
           <p:nvPr/>
         </p:nvSpPr>
         <p:spPr>
           <a:xfrm>
-            <a:off x="1143000" y="4724400"/>
-            <a:ext cx="1185827" cy="571500"/>
-          </a:xfrm>
-          <a:prstGeom prst="rect">
-            <a:avLst/>
-          </a:prstGeom>
-          <a:noFill/>
-        </p:spPr>
-        <p:txBody>
-          <a:bodyPr wrap="square" lIns="0" rIns="0" tIns="0" bIns="0" anchor="ctr">
-            <a:spAutoFit/>
-          </a:bodyPr>
-          <a:lstStyle/>
-          <a:p>
-            <a:pPr algn="ctr">
-              <a:lnSpc>
-                <a:spcPct val="100000"/>
-              </a:lnSpc>
-            </a:pPr>
-            <a:r>
-              <a:rPr sz="1800" b="1">
-                <a:solidFill>
-                  <a:srgbClr val="FFFFFF"/>
-                </a:solidFill>
-                <a:latin typeface="Pretendard"/>
-                <a:ea typeface="Pretendard"/>
-                <a:cs typeface="Pretendard"/>
-              </a:rPr>
-              <a:t>복합 조건</a:t>
-            </a:r>
-          </a:p>
-        </p:txBody>
-      </p:sp>
-      <p:sp>
-        <p:nvSpPr>
-          <p:cNvPr id="22" name="Rectangle 21"/>
+            <a:off x="2324100" y="5676900"/>
+            <a:ext cx="9906000" cy="400050"/>
+          </a:xfrm>
+          <a:prstGeom prst="rect">
+            <a:avLst/>
+          </a:prstGeom>
+          <a:noFill/>
+        </p:spPr>
+        <p:txBody>
+          <a:bodyPr wrap="square" lIns="0" rIns="0" tIns="0" bIns="0" anchor="t">
+            <a:spAutoFit/>
+          </a:bodyPr>
+          <a:lstStyle/>
+          <a:p>
+            <a:pPr algn="l">
+              <a:lnSpc>
+                <a:spcPct val="110000"/>
+              </a:lnSpc>
+            </a:pPr>
+            <a:r>
+              <a:rPr sz="2475" b="1">
+                <a:solidFill>
+                  <a:srgbClr val="0D2B5E"/>
+                </a:solidFill>
+                <a:latin typeface="Pretendard"/>
+                <a:ea typeface="Pretendard"/>
+                <a:cs typeface="Pretendard"/>
+              </a:rPr>
+              <a:t>products.select("product_id").distinct().count()</a:t>
+            </a:r>
+          </a:p>
+        </p:txBody>
+      </p:sp>
+      <p:sp>
+        <p:nvSpPr>
+          <p:cNvPr id="22" name="TextBox 21"/>
+          <p:cNvSpPr txBox="1"/>
+          <p:nvPr/>
+        </p:nvSpPr>
+        <p:spPr>
+          <a:xfrm>
+            <a:off x="2324100" y="6076950"/>
+            <a:ext cx="9906000" cy="361950"/>
+          </a:xfrm>
+          <a:prstGeom prst="rect">
+            <a:avLst/>
+          </a:prstGeom>
+          <a:noFill/>
+        </p:spPr>
+        <p:txBody>
+          <a:bodyPr wrap="square" lIns="0" rIns="0" tIns="0" bIns="0" anchor="t">
+            <a:spAutoFit/>
+          </a:bodyPr>
+          <a:lstStyle/>
+          <a:p>
+            <a:pPr algn="l">
+              <a:lnSpc>
+                <a:spcPct val="120000"/>
+              </a:lnSpc>
+            </a:pPr>
+            <a:r>
+              <a:rPr sz="2025" b="0">
+                <a:solidFill>
+                  <a:srgbClr val="3D3D3D"/>
+                </a:solidFill>
+                <a:latin typeface="Pretendard"/>
+                <a:ea typeface="Pretendard"/>
+                <a:cs typeface="Pretendard"/>
+              </a:rPr>
+              <a:t>「products 행: 3」 · 「product_id 고유: 3」 — validate 대신 이 한 줄</a:t>
+            </a:r>
+          </a:p>
+        </p:txBody>
+      </p:sp>
+      <p:sp>
+        <p:nvSpPr>
+          <p:cNvPr id="23" name="Rounded Rectangle 22"/>
           <p:cNvSpPr/>
           <p:nvPr/>
         </p:nvSpPr>
         <p:spPr>
           <a:xfrm>
-            <a:off x="2328827" y="4724400"/>
-            <a:ext cx="14816173" cy="571500"/>
-          </a:xfrm>
-          <a:prstGeom prst="rect">
-            <a:avLst/>
-          </a:prstGeom>
-          <a:solidFill>
-            <a:srgbClr val="FAFBFD"/>
+            <a:off x="13144500" y="2933700"/>
+            <a:ext cx="4000500" cy="3629025"/>
+          </a:xfrm>
+          <a:prstGeom prst="roundRect">
+            <a:avLst>
+              <a:gd name="adj" fmla="val 1312"/>
+            </a:avLst>
+          </a:prstGeom>
+          <a:solidFill>
+            <a:srgbClr val="EDF3FD"/>
           </a:solidFill>
           <a:ln w="9525">
             <a:solidFill>
-              <a:srgbClr val="DCE1E8"/>
+              <a:srgbClr val="BFD3F5"/>
             </a:solidFill>
           </a:ln>
           <a:effectLst/>
@@ -9598,61 +9694,120 @@
       </p:sp>
       <p:sp>
         <p:nvSpPr>
-          <p:cNvPr id="23" name="TextBox 22"/>
-          <p:cNvSpPr txBox="1"/>
-          <p:nvPr/>
-        </p:nvSpPr>
-        <p:spPr>
-          <a:xfrm>
-            <a:off x="2481227" y="4724400"/>
-            <a:ext cx="14511373" cy="571500"/>
-          </a:xfrm>
-          <a:prstGeom prst="rect">
-            <a:avLst/>
-          </a:prstGeom>
-          <a:noFill/>
-        </p:spPr>
-        <p:txBody>
-          <a:bodyPr wrap="square" lIns="0" rIns="0" tIns="0" bIns="0" anchor="ctr">
+          <p:cNvPr id="24" name="TextBox 23"/>
+          <p:cNvSpPr txBox="1"/>
+          <p:nvPr/>
+        </p:nvSpPr>
+        <p:spPr>
+          <a:xfrm>
+            <a:off x="13487400" y="3929062"/>
+            <a:ext cx="3314700" cy="304800"/>
+          </a:xfrm>
+          <a:prstGeom prst="rect">
+            <a:avLst/>
+          </a:prstGeom>
+          <a:noFill/>
+        </p:spPr>
+        <p:txBody>
+          <a:bodyPr wrap="square" lIns="0" rIns="0" tIns="0" bIns="0" anchor="t">
             <a:spAutoFit/>
           </a:bodyPr>
           <a:lstStyle/>
           <a:p>
             <a:pPr algn="l">
               <a:lnSpc>
-                <a:spcPct val="115000"/>
-              </a:lnSpc>
-            </a:pPr>
-            <a:r>
-              <a:rPr sz="1800" b="0">
-                <a:solidFill>
-                  <a:srgbClr val="3D3D3D"/>
-                </a:solidFill>
-                <a:latin typeface="Pretendard"/>
-                <a:ea typeface="Pretendard"/>
-                <a:cs typeface="Pretendard"/>
-              </a:rPr>
-              <a:t>(조건1) &amp; (조건2) — 괄호 필수, Pandas 와 같다</a:t>
-            </a:r>
-          </a:p>
-        </p:txBody>
-      </p:sp>
-      <p:sp>
-        <p:nvSpPr>
-          <p:cNvPr id="24" name="Rectangle 23"/>
+                <a:spcPct val="100000"/>
+              </a:lnSpc>
+            </a:pPr>
+            <a:r>
+              <a:rPr sz="1800" b="1" spc="190">
+                <a:solidFill>
+                  <a:srgbClr val="1E5BC6"/>
+                </a:solidFill>
+                <a:latin typeface="Pretendard"/>
+                <a:ea typeface="Pretendard"/>
+                <a:cs typeface="Pretendard"/>
+              </a:rPr>
+              <a:t>두 숫자</a:t>
+            </a:r>
+          </a:p>
+        </p:txBody>
+      </p:sp>
+      <p:sp>
+        <p:nvSpPr>
+          <p:cNvPr id="25" name="TextBox 24"/>
+          <p:cNvSpPr txBox="1"/>
+          <p:nvPr/>
+        </p:nvSpPr>
+        <p:spPr>
+          <a:xfrm>
+            <a:off x="13487400" y="4329112"/>
+            <a:ext cx="3314700" cy="1238250"/>
+          </a:xfrm>
+          <a:prstGeom prst="rect">
+            <a:avLst/>
+          </a:prstGeom>
+          <a:noFill/>
+        </p:spPr>
+        <p:txBody>
+          <a:bodyPr wrap="square" lIns="0" rIns="0" tIns="0" bIns="0" anchor="t">
+            <a:spAutoFit/>
+          </a:bodyPr>
+          <a:lstStyle/>
+          <a:p>
+            <a:pPr algn="l">
+              <a:lnSpc>
+                <a:spcPct val="138000"/>
+              </a:lnSpc>
+            </a:pPr>
+            <a:r>
+              <a:rPr sz="2700" b="1">
+                <a:solidFill>
+                  <a:srgbClr val="0D2B5E"/>
+                </a:solidFill>
+                <a:latin typeface="Pretendard"/>
+                <a:ea typeface="Pretendard"/>
+                <a:cs typeface="Pretendard"/>
+              </a:rPr>
+              <a:t>3 = 3</a:t>
+            </a:r>
+          </a:p>
+          <a:p>
+            <a:pPr algn="l">
+              <a:lnSpc>
+                <a:spcPct val="138000"/>
+              </a:lnSpc>
+            </a:pPr>
+            <a:r>
+              <a:rPr sz="2700" b="1">
+                <a:solidFill>
+                  <a:srgbClr val="0D2B5E"/>
+                </a:solidFill>
+                <a:latin typeface="Pretendard"/>
+                <a:ea typeface="Pretendard"/>
+                <a:cs typeface="Pretendard"/>
+              </a:rPr>
+              <a:t>이면 안전</a:t>
+            </a:r>
+          </a:p>
+        </p:txBody>
+      </p:sp>
+      <p:sp>
+        <p:nvSpPr>
+          <p:cNvPr id="26" name="Rectangle 25"/>
           <p:cNvSpPr/>
           <p:nvPr/>
         </p:nvSpPr>
         <p:spPr>
           <a:xfrm>
-            <a:off x="1143000" y="5372100"/>
-            <a:ext cx="1185827" cy="571500"/>
-          </a:xfrm>
-          <a:prstGeom prst="rect">
-            <a:avLst/>
-          </a:prstGeom>
-          <a:solidFill>
-            <a:srgbClr val="0D2B5E"/>
+            <a:off x="1143000" y="8058150"/>
+            <a:ext cx="16002000" cy="9525"/>
+          </a:xfrm>
+          <a:prstGeom prst="rect">
+            <a:avLst/>
+          </a:prstGeom>
+          <a:solidFill>
+            <a:srgbClr val="DCE1E8"/>
           </a:solidFill>
           <a:ln>
             <a:noFill/>
@@ -9669,336 +9824,7 @@
       </p:sp>
       <p:sp>
         <p:nvSpPr>
-          <p:cNvPr id="25" name="TextBox 24"/>
-          <p:cNvSpPr txBox="1"/>
-          <p:nvPr/>
-        </p:nvSpPr>
-        <p:spPr>
-          <a:xfrm>
-            <a:off x="1143000" y="5372100"/>
-            <a:ext cx="1185827" cy="571500"/>
-          </a:xfrm>
-          <a:prstGeom prst="rect">
-            <a:avLst/>
-          </a:prstGeom>
-          <a:noFill/>
-        </p:spPr>
-        <p:txBody>
-          <a:bodyPr wrap="square" lIns="0" rIns="0" tIns="0" bIns="0" anchor="ctr">
-            <a:spAutoFit/>
-          </a:bodyPr>
-          <a:lstStyle/>
-          <a:p>
-            <a:pPr algn="ctr">
-              <a:lnSpc>
-                <a:spcPct val="100000"/>
-              </a:lnSpc>
-            </a:pPr>
-            <a:r>
-              <a:rPr sz="1800" b="1">
-                <a:solidFill>
-                  <a:srgbClr val="FFFFFF"/>
-                </a:solidFill>
-                <a:latin typeface="Pretendard"/>
-                <a:ea typeface="Pretendard"/>
-                <a:cs typeface="Pretendard"/>
-              </a:rPr>
-              <a:t>집계</a:t>
-            </a:r>
-          </a:p>
-        </p:txBody>
-      </p:sp>
-      <p:sp>
-        <p:nvSpPr>
-          <p:cNvPr id="26" name="Rectangle 25"/>
-          <p:cNvSpPr/>
-          <p:nvPr/>
-        </p:nvSpPr>
-        <p:spPr>
-          <a:xfrm>
-            <a:off x="2328827" y="5372100"/>
-            <a:ext cx="14816173" cy="571500"/>
-          </a:xfrm>
-          <a:prstGeom prst="rect">
-            <a:avLst/>
-          </a:prstGeom>
-          <a:solidFill>
-            <a:srgbClr val="FAFBFD"/>
-          </a:solidFill>
-          <a:ln w="9525">
-            <a:solidFill>
-              <a:srgbClr val="DCE1E8"/>
-            </a:solidFill>
-          </a:ln>
-          <a:effectLst/>
-        </p:spPr>
-        <p:txBody>
-          <a:bodyPr rtlCol="0" anchor="ctr" wrap="square"/>
-          <a:lstStyle/>
-          <a:p>
-            <a:pPr algn="ctr"/>
-          </a:p>
-        </p:txBody>
-      </p:sp>
-      <p:sp>
-        <p:nvSpPr>
           <p:cNvPr id="27" name="TextBox 26"/>
-          <p:cNvSpPr txBox="1"/>
-          <p:nvPr/>
-        </p:nvSpPr>
-        <p:spPr>
-          <a:xfrm>
-            <a:off x="2481227" y="5372100"/>
-            <a:ext cx="14511373" cy="571500"/>
-          </a:xfrm>
-          <a:prstGeom prst="rect">
-            <a:avLst/>
-          </a:prstGeom>
-          <a:noFill/>
-        </p:spPr>
-        <p:txBody>
-          <a:bodyPr wrap="square" lIns="0" rIns="0" tIns="0" bIns="0" anchor="ctr">
-            <a:spAutoFit/>
-          </a:bodyPr>
-          <a:lstStyle/>
-          <a:p>
-            <a:pPr algn="l">
-              <a:lnSpc>
-                <a:spcPct val="115000"/>
-              </a:lnSpc>
-            </a:pPr>
-            <a:r>
-              <a:rPr sz="1800" b="0">
-                <a:solidFill>
-                  <a:srgbClr val="3D3D3D"/>
-                </a:solidFill>
-                <a:latin typeface="Pretendard"/>
-                <a:ea typeface="Pretendard"/>
-                <a:cs typeface="Pretendard"/>
-              </a:rPr>
-              <a:t>groupBy("name").agg(F.sum("amount").alias("total_amount"))</a:t>
-            </a:r>
-          </a:p>
-        </p:txBody>
-      </p:sp>
-      <p:sp>
-        <p:nvSpPr>
-          <p:cNvPr id="28" name="Rectangle 27"/>
-          <p:cNvSpPr/>
-          <p:nvPr/>
-        </p:nvSpPr>
-        <p:spPr>
-          <a:xfrm>
-            <a:off x="1143000" y="6019800"/>
-            <a:ext cx="1185827" cy="571500"/>
-          </a:xfrm>
-          <a:prstGeom prst="rect">
-            <a:avLst/>
-          </a:prstGeom>
-          <a:solidFill>
-            <a:srgbClr val="0D2B5E"/>
-          </a:solidFill>
-          <a:ln>
-            <a:noFill/>
-          </a:ln>
-          <a:effectLst/>
-        </p:spPr>
-        <p:txBody>
-          <a:bodyPr rtlCol="0" anchor="ctr" wrap="square"/>
-          <a:lstStyle/>
-          <a:p>
-            <a:pPr algn="ctr"/>
-          </a:p>
-        </p:txBody>
-      </p:sp>
-      <p:sp>
-        <p:nvSpPr>
-          <p:cNvPr id="29" name="TextBox 28"/>
-          <p:cNvSpPr txBox="1"/>
-          <p:nvPr/>
-        </p:nvSpPr>
-        <p:spPr>
-          <a:xfrm>
-            <a:off x="1143000" y="6019800"/>
-            <a:ext cx="1185827" cy="571500"/>
-          </a:xfrm>
-          <a:prstGeom prst="rect">
-            <a:avLst/>
-          </a:prstGeom>
-          <a:noFill/>
-        </p:spPr>
-        <p:txBody>
-          <a:bodyPr wrap="square" lIns="0" rIns="0" tIns="0" bIns="0" anchor="ctr">
-            <a:spAutoFit/>
-          </a:bodyPr>
-          <a:lstStyle/>
-          <a:p>
-            <a:pPr algn="ctr">
-              <a:lnSpc>
-                <a:spcPct val="100000"/>
-              </a:lnSpc>
-            </a:pPr>
-            <a:r>
-              <a:rPr sz="1800" b="1">
-                <a:solidFill>
-                  <a:srgbClr val="FFFFFF"/>
-                </a:solidFill>
-                <a:latin typeface="Pretendard"/>
-                <a:ea typeface="Pretendard"/>
-                <a:cs typeface="Pretendard"/>
-              </a:rPr>
-              <a:t>정렬</a:t>
-            </a:r>
-          </a:p>
-        </p:txBody>
-      </p:sp>
-      <p:sp>
-        <p:nvSpPr>
-          <p:cNvPr id="30" name="Rectangle 29"/>
-          <p:cNvSpPr/>
-          <p:nvPr/>
-        </p:nvSpPr>
-        <p:spPr>
-          <a:xfrm>
-            <a:off x="2328827" y="6019800"/>
-            <a:ext cx="14816173" cy="571500"/>
-          </a:xfrm>
-          <a:prstGeom prst="rect">
-            <a:avLst/>
-          </a:prstGeom>
-          <a:solidFill>
-            <a:srgbClr val="FAFBFD"/>
-          </a:solidFill>
-          <a:ln w="9525">
-            <a:solidFill>
-              <a:srgbClr val="DCE1E8"/>
-            </a:solidFill>
-          </a:ln>
-          <a:effectLst/>
-        </p:spPr>
-        <p:txBody>
-          <a:bodyPr rtlCol="0" anchor="ctr" wrap="square"/>
-          <a:lstStyle/>
-          <a:p>
-            <a:pPr algn="ctr"/>
-          </a:p>
-        </p:txBody>
-      </p:sp>
-      <p:sp>
-        <p:nvSpPr>
-          <p:cNvPr id="31" name="TextBox 30"/>
-          <p:cNvSpPr txBox="1"/>
-          <p:nvPr/>
-        </p:nvSpPr>
-        <p:spPr>
-          <a:xfrm>
-            <a:off x="2481227" y="6019800"/>
-            <a:ext cx="14511373" cy="571500"/>
-          </a:xfrm>
-          <a:prstGeom prst="rect">
-            <a:avLst/>
-          </a:prstGeom>
-          <a:noFill/>
-        </p:spPr>
-        <p:txBody>
-          <a:bodyPr wrap="square" lIns="0" rIns="0" tIns="0" bIns="0" anchor="ctr">
-            <a:spAutoFit/>
-          </a:bodyPr>
-          <a:lstStyle/>
-          <a:p>
-            <a:pPr algn="l">
-              <a:lnSpc>
-                <a:spcPct val="115000"/>
-              </a:lnSpc>
-            </a:pPr>
-            <a:r>
-              <a:rPr sz="1800" b="0">
-                <a:solidFill>
-                  <a:srgbClr val="3D3D3D"/>
-                </a:solidFill>
-                <a:latin typeface="Pretendard"/>
-                <a:ea typeface="Pretendard"/>
-                <a:cs typeface="Pretendard"/>
-              </a:rPr>
-              <a:t>orderBy(F.desc("total_amount"))</a:t>
-            </a:r>
-          </a:p>
-        </p:txBody>
-      </p:sp>
-      <p:sp>
-        <p:nvSpPr>
-          <p:cNvPr id="32" name="TextBox 31"/>
-          <p:cNvSpPr txBox="1"/>
-          <p:nvPr/>
-        </p:nvSpPr>
-        <p:spPr>
-          <a:xfrm>
-            <a:off x="1143000" y="7620000"/>
-            <a:ext cx="16002000" cy="342900"/>
-          </a:xfrm>
-          <a:prstGeom prst="rect">
-            <a:avLst/>
-          </a:prstGeom>
-          <a:noFill/>
-        </p:spPr>
-        <p:txBody>
-          <a:bodyPr wrap="square" lIns="0" rIns="0" tIns="0" bIns="0" anchor="t">
-            <a:spAutoFit/>
-          </a:bodyPr>
-          <a:lstStyle/>
-          <a:p>
-            <a:pPr algn="l">
-              <a:lnSpc>
-                <a:spcPct val="100000"/>
-              </a:lnSpc>
-            </a:pPr>
-            <a:r>
-              <a:rPr sz="1875" b="1">
-                <a:solidFill>
-                  <a:srgbClr val="7D7D7D"/>
-                </a:solidFill>
-                <a:latin typeface="Pretendard"/>
-                <a:ea typeface="Pretendard"/>
-                <a:cs typeface="Pretendard"/>
-              </a:rPr>
-              <a:t>여러 집계는 agg 안에 F.count("*") · F.sum · F.avg · F.max 를 나란히 — alias 로 이름을 정한다(3-2 명명 집계)</a:t>
-            </a:r>
-          </a:p>
-        </p:txBody>
-      </p:sp>
-      <p:sp>
-        <p:nvSpPr>
-          <p:cNvPr id="33" name="Rectangle 32"/>
-          <p:cNvSpPr/>
-          <p:nvPr/>
-        </p:nvSpPr>
-        <p:spPr>
-          <a:xfrm>
-            <a:off x="1143000" y="8058150"/>
-            <a:ext cx="16002000" cy="9525"/>
-          </a:xfrm>
-          <a:prstGeom prst="rect">
-            <a:avLst/>
-          </a:prstGeom>
-          <a:solidFill>
-            <a:srgbClr val="DCE1E8"/>
-          </a:solidFill>
-          <a:ln>
-            <a:noFill/>
-          </a:ln>
-          <a:effectLst/>
-        </p:spPr>
-        <p:txBody>
-          <a:bodyPr rtlCol="0" anchor="ctr" wrap="square"/>
-          <a:lstStyle/>
-          <a:p>
-            <a:pPr algn="ctr"/>
-          </a:p>
-        </p:txBody>
-      </p:sp>
-      <p:sp>
-        <p:nvSpPr>
-          <p:cNvPr id="34" name="TextBox 33"/>
           <p:cNvSpPr txBox="1"/>
           <p:nvPr/>
         </p:nvSpPr>
@@ -10039,7 +9865,7 @@
       </p:sp>
       <p:sp>
         <p:nvSpPr>
-          <p:cNvPr id="35" name="TextBox 34"/>
+          <p:cNvPr id="28" name="TextBox 27"/>
           <p:cNvSpPr txBox="1"/>
           <p:nvPr/>
         </p:nvSpPr>
@@ -10098,7 +9924,7 @@
       <p:grpSpPr/>
       <p:sp>
         <p:nvSpPr>
-          <p:cNvPr id="2" name="Oval 1"/>
+          <p:cNvPr id="2" name="deckgen:decor"/>
           <p:cNvSpPr/>
           <p:nvPr/>
         </p:nvSpPr>
@@ -10128,7 +9954,7 @@
       </p:sp>
       <p:sp>
         <p:nvSpPr>
-          <p:cNvPr id="3" name="Oval 2"/>
+          <p:cNvPr id="3" name="deckgen:decor"/>
           <p:cNvSpPr/>
           <p:nvPr/>
         </p:nvSpPr>
@@ -10158,7 +9984,7 @@
       </p:sp>
       <p:sp>
         <p:nvSpPr>
-          <p:cNvPr id="4" name="Oval 3"/>
+          <p:cNvPr id="4" name="deckgen:decor"/>
           <p:cNvSpPr/>
           <p:nvPr/>
         </p:nvSpPr>
@@ -10222,7 +10048,7 @@
                 <a:ea typeface="Pretendard"/>
                 <a:cs typeface="Pretendard"/>
               </a:rPr>
-              <a:t>3단계</a:t>
+              <a:t>4단계 · 일부러 실패시키기</a:t>
             </a:r>
           </a:p>
         </p:txBody>
@@ -10263,7 +10089,7 @@
                 <a:ea typeface="Pretendard"/>
                 <a:cs typeface="Pretendard"/>
               </a:rPr>
-              <a:t>조인 전후 행 수를 센다 — 5행 → 5행</a:t>
+              <a:t>조인 키를 조건식으로 주면 — ambiguous</a:t>
             </a:r>
           </a:p>
         </p:txBody>
@@ -10300,18 +10126,59 @@
       </p:sp>
       <p:sp>
         <p:nvSpPr>
-          <p:cNvPr id="8" name="Rounded Rectangle 7"/>
+          <p:cNvPr id="8" name="TextBox 7"/>
+          <p:cNvSpPr txBox="1"/>
+          <p:nvPr/>
+        </p:nvSpPr>
+        <p:spPr>
+          <a:xfrm>
+            <a:off x="1143000" y="3067050"/>
+            <a:ext cx="16002000" cy="438150"/>
+          </a:xfrm>
+          <a:prstGeom prst="rect">
+            <a:avLst/>
+          </a:prstGeom>
+          <a:noFill/>
+        </p:spPr>
+        <p:txBody>
+          <a:bodyPr wrap="square" lIns="0" rIns="0" tIns="0" bIns="0" anchor="t">
+            <a:spAutoFit/>
+          </a:bodyPr>
+          <a:lstStyle/>
+          <a:p>
+            <a:pPr algn="l">
+              <a:lnSpc>
+                <a:spcPct val="130000"/>
+              </a:lnSpc>
+            </a:pPr>
+            <a:r>
+              <a:rPr sz="2550" b="1">
+                <a:solidFill>
+                  <a:srgbClr val="3D3D3D"/>
+                </a:solidFill>
+                <a:latin typeface="Pretendard"/>
+                <a:ea typeface="Pretendard"/>
+                <a:cs typeface="Pretendard"/>
+              </a:rPr>
+              <a:t>이론의 「키를 문자열로」가 왜 규칙인지 — 오류를 한 번 직접 봅니다</a:t>
+            </a:r>
+          </a:p>
+        </p:txBody>
+      </p:sp>
+      <p:sp>
+        <p:nvSpPr>
+          <p:cNvPr id="9" name="Rounded Rectangle 8"/>
           <p:cNvSpPr/>
           <p:nvPr/>
         </p:nvSpPr>
         <p:spPr>
           <a:xfrm>
-            <a:off x="1143000" y="2933700"/>
-            <a:ext cx="11430000" cy="1095375"/>
+            <a:off x="1143000" y="3924300"/>
+            <a:ext cx="2895600" cy="3143250"/>
           </a:xfrm>
           <a:prstGeom prst="roundRect">
             <a:avLst>
-              <a:gd name="adj" fmla="val 4347"/>
+              <a:gd name="adj" fmla="val 1644"/>
             </a:avLst>
           </a:prstGeom>
           <a:solidFill>
@@ -10334,16 +10201,16 @@
       </p:sp>
       <p:sp>
         <p:nvSpPr>
-          <p:cNvPr id="9" name="Oval 8"/>
+          <p:cNvPr id="10" name="Rectangle 9"/>
           <p:cNvSpPr/>
           <p:nvPr/>
         </p:nvSpPr>
         <p:spPr>
           <a:xfrm>
-            <a:off x="1447800" y="3181350"/>
-            <a:ext cx="590550" cy="590550"/>
-          </a:xfrm>
-          <a:prstGeom prst="ellipse">
+            <a:off x="1143000" y="3924300"/>
+            <a:ext cx="2895600" cy="914400"/>
+          </a:xfrm>
+          <a:prstGeom prst="rect">
             <a:avLst/>
           </a:prstGeom>
           <a:solidFill>
@@ -10364,14 +10231,14 @@
       </p:sp>
       <p:sp>
         <p:nvSpPr>
-          <p:cNvPr id="10" name="TextBox 9"/>
-          <p:cNvSpPr txBox="1"/>
-          <p:nvPr/>
-        </p:nvSpPr>
-        <p:spPr>
-          <a:xfrm>
-            <a:off x="1447800" y="3333750"/>
-            <a:ext cx="590550" cy="323850"/>
+          <p:cNvPr id="11" name="TextBox 10"/>
+          <p:cNvSpPr txBox="1"/>
+          <p:nvPr/>
+        </p:nvSpPr>
+        <p:spPr>
+          <a:xfrm>
+            <a:off x="1143000" y="4171950"/>
+            <a:ext cx="2895600" cy="419100"/>
           </a:xfrm>
           <a:prstGeom prst="rect">
             <a:avLst/>
@@ -10390,7 +10257,7 @@
               </a:lnSpc>
             </a:pPr>
             <a:r>
-              <a:rPr sz="2250" b="1">
+              <a:rPr sz="2475" b="1">
                 <a:solidFill>
                   <a:srgbClr val="FFFFFF"/>
                 </a:solidFill>
@@ -10398,21 +10265,21 @@
                 <a:ea typeface="Pretendard"/>
                 <a:cs typeface="Pretendard"/>
               </a:rPr>
-              <a:t>1</a:t>
-            </a:r>
-          </a:p>
-        </p:txBody>
-      </p:sp>
-      <p:sp>
-        <p:nvSpPr>
-          <p:cNvPr id="11" name="TextBox 10"/>
-          <p:cNvSpPr txBox="1"/>
-          <p:nvPr/>
-        </p:nvSpPr>
-        <p:spPr>
-          <a:xfrm>
-            <a:off x="2324100" y="3143250"/>
-            <a:ext cx="9906000" cy="400050"/>
+              <a:t>1. 조건식 조인</a:t>
+            </a:r>
+          </a:p>
+        </p:txBody>
+      </p:sp>
+      <p:sp>
+        <p:nvSpPr>
+          <p:cNvPr id="12" name="TextBox 11"/>
+          <p:cNvSpPr txBox="1"/>
+          <p:nvPr/>
+        </p:nvSpPr>
+        <p:spPr>
+          <a:xfrm>
+            <a:off x="1352550" y="5143500"/>
+            <a:ext cx="2476500" cy="1524000"/>
           </a:xfrm>
           <a:prstGeom prst="rect">
             <a:avLst/>
@@ -10425,54 +10292,13 @@
           </a:bodyPr>
           <a:lstStyle/>
           <a:p>
-            <a:pPr algn="l">
-              <a:lnSpc>
-                <a:spcPct val="110000"/>
-              </a:lnSpc>
-            </a:pPr>
-            <a:r>
-              <a:rPr sz="2475" b="1">
-                <a:solidFill>
-                  <a:srgbClr val="0D2B5E"/>
-                </a:solidFill>
-                <a:latin typeface="Pretendard"/>
-                <a:ea typeface="Pretendard"/>
-                <a:cs typeface="Pretendard"/>
-              </a:rPr>
-              <a:t>print(orders.count(), joined.count())</a:t>
-            </a:r>
-          </a:p>
-        </p:txBody>
-      </p:sp>
-      <p:sp>
-        <p:nvSpPr>
-          <p:cNvPr id="12" name="TextBox 11"/>
-          <p:cNvSpPr txBox="1"/>
-          <p:nvPr/>
-        </p:nvSpPr>
-        <p:spPr>
-          <a:xfrm>
-            <a:off x="2324100" y="3543300"/>
-            <a:ext cx="9906000" cy="361950"/>
-          </a:xfrm>
-          <a:prstGeom prst="rect">
-            <a:avLst/>
-          </a:prstGeom>
-          <a:noFill/>
-        </p:spPr>
-        <p:txBody>
-          <a:bodyPr wrap="square" lIns="0" rIns="0" tIns="0" bIns="0" anchor="t">
-            <a:spAutoFit/>
-          </a:bodyPr>
-          <a:lstStyle/>
-          <a:p>
-            <a:pPr algn="l">
-              <a:lnSpc>
-                <a:spcPct val="120000"/>
-              </a:lnSpc>
-            </a:pPr>
-            <a:r>
-              <a:rPr sz="2025" b="0">
+            <a:pPr algn="ctr">
+              <a:lnSpc>
+                <a:spcPct val="146000"/>
+              </a:lnSpc>
+            </a:pPr>
+            <a:r>
+              <a:rPr sz="2100" b="0">
                 <a:solidFill>
                   <a:srgbClr val="3D3D3D"/>
                 </a:solidFill>
@@ -10480,7 +10306,25 @@
                 <a:ea typeface="Pretendard"/>
                 <a:cs typeface="Pretendard"/>
               </a:rPr>
-              <a:t>조인 전후 모두 5행 — products 의 product_id 가 고유하므로</a:t>
+              <a:t>orders["product_id"]</a:t>
+            </a:r>
+          </a:p>
+          <a:p>
+            <a:pPr algn="ctr">
+              <a:lnSpc>
+                <a:spcPct val="146000"/>
+              </a:lnSpc>
+            </a:pPr>
+            <a:r>
+              <a:rPr sz="2100" b="0">
+                <a:solidFill>
+                  <a:srgbClr val="3D3D3D"/>
+                </a:solidFill>
+                <a:latin typeface="Pretendard"/>
+                <a:ea typeface="Pretendard"/>
+                <a:cs typeface="Pretendard"/>
+              </a:rPr>
+              <a:t>== products[…]</a:t>
             </a:r>
           </a:p>
         </p:txBody>
@@ -10493,12 +10337,12 @@
         </p:nvSpPr>
         <p:spPr>
           <a:xfrm>
-            <a:off x="1143000" y="4200525"/>
-            <a:ext cx="11430000" cy="1095375"/>
+            <a:off x="4419600" y="3924300"/>
+            <a:ext cx="2895600" cy="3143250"/>
           </a:xfrm>
           <a:prstGeom prst="roundRect">
             <a:avLst>
-              <a:gd name="adj" fmla="val 4347"/>
+              <a:gd name="adj" fmla="val 1644"/>
             </a:avLst>
           </a:prstGeom>
           <a:solidFill>
@@ -10521,20 +10365,20 @@
       </p:sp>
       <p:sp>
         <p:nvSpPr>
-          <p:cNvPr id="14" name="Oval 13"/>
+          <p:cNvPr id="14" name="Rectangle 13"/>
           <p:cNvSpPr/>
           <p:nvPr/>
         </p:nvSpPr>
         <p:spPr>
           <a:xfrm>
-            <a:off x="1447800" y="4448175"/>
-            <a:ext cx="590550" cy="590550"/>
-          </a:xfrm>
-          <a:prstGeom prst="ellipse">
-            <a:avLst/>
-          </a:prstGeom>
-          <a:solidFill>
-            <a:srgbClr val="0D2B5E"/>
+            <a:off x="4419600" y="3924300"/>
+            <a:ext cx="2895600" cy="914400"/>
+          </a:xfrm>
+          <a:prstGeom prst="rect">
+            <a:avLst/>
+          </a:prstGeom>
+          <a:solidFill>
+            <a:srgbClr val="1E5BC6"/>
           </a:solidFill>
           <a:ln>
             <a:noFill/>
@@ -10557,8 +10401,8 @@
         </p:nvSpPr>
         <p:spPr>
           <a:xfrm>
-            <a:off x="1447800" y="4600575"/>
-            <a:ext cx="590550" cy="323850"/>
+            <a:off x="4419600" y="4171950"/>
+            <a:ext cx="2895600" cy="419100"/>
           </a:xfrm>
           <a:prstGeom prst="rect">
             <a:avLst/>
@@ -10577,7 +10421,7 @@
               </a:lnSpc>
             </a:pPr>
             <a:r>
-              <a:rPr sz="2250" b="1">
+              <a:rPr sz="2475" b="1">
                 <a:solidFill>
                   <a:srgbClr val="FFFFFF"/>
                 </a:solidFill>
@@ -10585,7 +10429,7 @@
                 <a:ea typeface="Pretendard"/>
                 <a:cs typeface="Pretendard"/>
               </a:rPr>
-              <a:t>2</a:t>
+              <a:t>2. bad.columns</a:t>
             </a:r>
           </a:p>
         </p:txBody>
@@ -10598,8 +10442,8 @@
         </p:nvSpPr>
         <p:spPr>
           <a:xfrm>
-            <a:off x="2324100" y="4410075"/>
-            <a:ext cx="9906000" cy="400050"/>
+            <a:off x="4629150" y="5143500"/>
+            <a:ext cx="2476500" cy="1524000"/>
           </a:xfrm>
           <a:prstGeom prst="rect">
             <a:avLst/>
@@ -10612,54 +10456,13 @@
           </a:bodyPr>
           <a:lstStyle/>
           <a:p>
-            <a:pPr algn="l">
-              <a:lnSpc>
-                <a:spcPct val="110000"/>
-              </a:lnSpc>
-            </a:pPr>
-            <a:r>
-              <a:rPr sz="2475" b="1">
-                <a:solidFill>
-                  <a:srgbClr val="0D2B5E"/>
-                </a:solidFill>
-                <a:latin typeface="Pretendard"/>
-                <a:ea typeface="Pretendard"/>
-                <a:cs typeface="Pretendard"/>
-              </a:rPr>
-              <a:t>행이 늘었다면 오른쪽 키 중복</a:t>
-            </a:r>
-          </a:p>
-        </p:txBody>
-      </p:sp>
-      <p:sp>
-        <p:nvSpPr>
-          <p:cNvPr id="17" name="TextBox 16"/>
-          <p:cNvSpPr txBox="1"/>
-          <p:nvPr/>
-        </p:nvSpPr>
-        <p:spPr>
-          <a:xfrm>
-            <a:off x="2324100" y="4810125"/>
-            <a:ext cx="9906000" cy="361950"/>
-          </a:xfrm>
-          <a:prstGeom prst="rect">
-            <a:avLst/>
-          </a:prstGeom>
-          <a:noFill/>
-        </p:spPr>
-        <p:txBody>
-          <a:bodyPr wrap="square" lIns="0" rIns="0" tIns="0" bIns="0" anchor="t">
-            <a:spAutoFit/>
-          </a:bodyPr>
-          <a:lstStyle/>
-          <a:p>
-            <a:pPr algn="l">
-              <a:lnSpc>
-                <a:spcPct val="120000"/>
-              </a:lnSpc>
-            </a:pPr>
-            <a:r>
-              <a:rPr sz="2025" b="0">
+            <a:pPr algn="ctr">
+              <a:lnSpc>
+                <a:spcPct val="146000"/>
+              </a:lnSpc>
+            </a:pPr>
+            <a:r>
+              <a:rPr sz="2100" b="0">
                 <a:solidFill>
                   <a:srgbClr val="3D3D3D"/>
                 </a:solidFill>
@@ -10667,25 +10470,43 @@
                 <a:ea typeface="Pretendard"/>
                 <a:cs typeface="Pretendard"/>
               </a:rPr>
-              <a:t>3-2 에서 본 사고 — 합계가 부풀려진다</a:t>
-            </a:r>
-          </a:p>
-        </p:txBody>
-      </p:sp>
-      <p:sp>
-        <p:nvSpPr>
-          <p:cNvPr id="18" name="Rounded Rectangle 17"/>
+              <a:t>product_id 가</a:t>
+            </a:r>
+          </a:p>
+          <a:p>
+            <a:pPr algn="ctr">
+              <a:lnSpc>
+                <a:spcPct val="146000"/>
+              </a:lnSpc>
+            </a:pPr>
+            <a:r>
+              <a:rPr sz="2100" b="0">
+                <a:solidFill>
+                  <a:srgbClr val="3D3D3D"/>
+                </a:solidFill>
+                <a:latin typeface="Pretendard"/>
+                <a:ea typeface="Pretendard"/>
+                <a:cs typeface="Pretendard"/>
+              </a:rPr>
+              <a:t>두 번</a:t>
+            </a:r>
+          </a:p>
+        </p:txBody>
+      </p:sp>
+      <p:sp>
+        <p:nvSpPr>
+          <p:cNvPr id="17" name="Rounded Rectangle 16"/>
           <p:cNvSpPr/>
           <p:nvPr/>
         </p:nvSpPr>
         <p:spPr>
           <a:xfrm>
-            <a:off x="1143000" y="5467350"/>
-            <a:ext cx="11430000" cy="1095375"/>
+            <a:off x="7696200" y="3924300"/>
+            <a:ext cx="2895600" cy="3143250"/>
           </a:xfrm>
           <a:prstGeom prst="roundRect">
             <a:avLst>
-              <a:gd name="adj" fmla="val 4347"/>
+              <a:gd name="adj" fmla="val 1644"/>
             </a:avLst>
           </a:prstGeom>
           <a:solidFill>
@@ -10708,16 +10529,16 @@
       </p:sp>
       <p:sp>
         <p:nvSpPr>
-          <p:cNvPr id="19" name="Oval 18"/>
+          <p:cNvPr id="18" name="Rectangle 17"/>
           <p:cNvSpPr/>
           <p:nvPr/>
         </p:nvSpPr>
         <p:spPr>
           <a:xfrm>
-            <a:off x="1447800" y="5715000"/>
-            <a:ext cx="590550" cy="590550"/>
-          </a:xfrm>
-          <a:prstGeom prst="ellipse">
+            <a:off x="7696200" y="3924300"/>
+            <a:ext cx="2895600" cy="914400"/>
+          </a:xfrm>
+          <a:prstGeom prst="rect">
             <a:avLst/>
           </a:prstGeom>
           <a:solidFill>
@@ -10738,14 +10559,55 @@
       </p:sp>
       <p:sp>
         <p:nvSpPr>
+          <p:cNvPr id="19" name="TextBox 18"/>
+          <p:cNvSpPr txBox="1"/>
+          <p:nvPr/>
+        </p:nvSpPr>
+        <p:spPr>
+          <a:xfrm>
+            <a:off x="7696200" y="4171950"/>
+            <a:ext cx="2895600" cy="419100"/>
+          </a:xfrm>
+          <a:prstGeom prst="rect">
+            <a:avLst/>
+          </a:prstGeom>
+          <a:noFill/>
+        </p:spPr>
+        <p:txBody>
+          <a:bodyPr wrap="square" lIns="0" rIns="0" tIns="0" bIns="0" anchor="t">
+            <a:spAutoFit/>
+          </a:bodyPr>
+          <a:lstStyle/>
+          <a:p>
+            <a:pPr algn="ctr">
+              <a:lnSpc>
+                <a:spcPct val="100000"/>
+              </a:lnSpc>
+            </a:pPr>
+            <a:r>
+              <a:rPr sz="2475" b="1">
+                <a:solidFill>
+                  <a:srgbClr val="FFFFFF"/>
+                </a:solidFill>
+                <a:latin typeface="Pretendard"/>
+                <a:ea typeface="Pretendard"/>
+                <a:cs typeface="Pretendard"/>
+              </a:rPr>
+              <a:t>3. 오류</a:t>
+            </a:r>
+          </a:p>
+        </p:txBody>
+      </p:sp>
+      <p:sp>
+        <p:nvSpPr>
           <p:cNvPr id="20" name="TextBox 19"/>
           <p:cNvSpPr txBox="1"/>
           <p:nvPr/>
         </p:nvSpPr>
         <p:spPr>
           <a:xfrm>
-            <a:off x="1447800" y="5867400"/>
-            <a:ext cx="590550" cy="323850"/>
+            <a:off x="7905750" y="5143500"/>
+            <a:ext cx="2476500" cy="1524000"/>
           </a:xfrm>
           <a:prstGeom prst="rect">
             <a:avLst/>
@@ -10760,93 +10622,11 @@
           <a:p>
             <a:pPr algn="ctr">
               <a:lnSpc>
-                <a:spcPct val="100000"/>
-              </a:lnSpc>
-            </a:pPr>
-            <a:r>
-              <a:rPr sz="2250" b="1">
-                <a:solidFill>
-                  <a:srgbClr val="FFFFFF"/>
-                </a:solidFill>
-                <a:latin typeface="Pretendard"/>
-                <a:ea typeface="Pretendard"/>
-                <a:cs typeface="Pretendard"/>
-              </a:rPr>
-              <a:t>3</a:t>
-            </a:r>
-          </a:p>
-        </p:txBody>
-      </p:sp>
-      <p:sp>
-        <p:nvSpPr>
-          <p:cNvPr id="21" name="TextBox 20"/>
-          <p:cNvSpPr txBox="1"/>
-          <p:nvPr/>
-        </p:nvSpPr>
-        <p:spPr>
-          <a:xfrm>
-            <a:off x="2324100" y="5676900"/>
-            <a:ext cx="9906000" cy="400050"/>
-          </a:xfrm>
-          <a:prstGeom prst="rect">
-            <a:avLst/>
-          </a:prstGeom>
-          <a:noFill/>
-        </p:spPr>
-        <p:txBody>
-          <a:bodyPr wrap="square" lIns="0" rIns="0" tIns="0" bIns="0" anchor="t">
-            <a:spAutoFit/>
-          </a:bodyPr>
-          <a:lstStyle/>
-          <a:p>
-            <a:pPr algn="l">
-              <a:lnSpc>
-                <a:spcPct val="110000"/>
-              </a:lnSpc>
-            </a:pPr>
-            <a:r>
-              <a:rPr sz="2475" b="1">
-                <a:solidFill>
-                  <a:srgbClr val="0D2B5E"/>
-                </a:solidFill>
-                <a:latin typeface="Pretendard"/>
-                <a:ea typeface="Pretendard"/>
-                <a:cs typeface="Pretendard"/>
-              </a:rPr>
-              <a:t>select("product_id").distinct().count()</a:t>
-            </a:r>
-          </a:p>
-        </p:txBody>
-      </p:sp>
-      <p:sp>
-        <p:nvSpPr>
-          <p:cNvPr id="22" name="TextBox 21"/>
-          <p:cNvSpPr txBox="1"/>
-          <p:nvPr/>
-        </p:nvSpPr>
-        <p:spPr>
-          <a:xfrm>
-            <a:off x="2324100" y="6076950"/>
-            <a:ext cx="9906000" cy="361950"/>
-          </a:xfrm>
-          <a:prstGeom prst="rect">
-            <a:avLst/>
-          </a:prstGeom>
-          <a:noFill/>
-        </p:spPr>
-        <p:txBody>
-          <a:bodyPr wrap="square" lIns="0" rIns="0" tIns="0" bIns="0" anchor="t">
-            <a:spAutoFit/>
-          </a:bodyPr>
-          <a:lstStyle/>
-          <a:p>
-            <a:pPr algn="l">
-              <a:lnSpc>
-                <a:spcPct val="120000"/>
-              </a:lnSpc>
-            </a:pPr>
-            <a:r>
-              <a:rPr sz="2025" b="0">
+                <a:spcPct val="146000"/>
+              </a:lnSpc>
+            </a:pPr>
+            <a:r>
+              <a:rPr sz="2100" b="0">
                 <a:solidFill>
                   <a:srgbClr val="3D3D3D"/>
                 </a:solidFill>
@@ -10854,33 +10634,51 @@
                 <a:ea typeface="Pretendard"/>
                 <a:cs typeface="Pretendard"/>
               </a:rPr>
-              <a:t>products.count() 와 같으면 안전 — validate 대신 이 한 줄</a:t>
-            </a:r>
-          </a:p>
-        </p:txBody>
-      </p:sp>
-      <p:sp>
-        <p:nvSpPr>
-          <p:cNvPr id="23" name="Rounded Rectangle 22"/>
+              <a:t>AMBIGUOUS_</a:t>
+            </a:r>
+          </a:p>
+          <a:p>
+            <a:pPr algn="ctr">
+              <a:lnSpc>
+                <a:spcPct val="146000"/>
+              </a:lnSpc>
+            </a:pPr>
+            <a:r>
+              <a:rPr sz="2100" b="0">
+                <a:solidFill>
+                  <a:srgbClr val="3D3D3D"/>
+                </a:solidFill>
+                <a:latin typeface="Pretendard"/>
+                <a:ea typeface="Pretendard"/>
+                <a:cs typeface="Pretendard"/>
+              </a:rPr>
+              <a:t>REFERENCE</a:t>
+            </a:r>
+          </a:p>
+        </p:txBody>
+      </p:sp>
+      <p:sp>
+        <p:nvSpPr>
+          <p:cNvPr id="21" name="Rounded Rectangle 20"/>
           <p:cNvSpPr/>
           <p:nvPr/>
         </p:nvSpPr>
         <p:spPr>
           <a:xfrm>
-            <a:off x="13144500" y="2933700"/>
-            <a:ext cx="4000500" cy="3629025"/>
+            <a:off x="10972800" y="3924300"/>
+            <a:ext cx="2895600" cy="3143250"/>
           </a:xfrm>
           <a:prstGeom prst="roundRect">
             <a:avLst>
-              <a:gd name="adj" fmla="val 1312"/>
+              <a:gd name="adj" fmla="val 1644"/>
             </a:avLst>
           </a:prstGeom>
           <a:solidFill>
-            <a:srgbClr val="EDF3FD"/>
+            <a:srgbClr val="FAFBFD"/>
           </a:solidFill>
           <a:ln w="9525">
             <a:solidFill>
-              <a:srgbClr val="BFD3F5"/>
+              <a:srgbClr val="DCE1E8"/>
             </a:solidFill>
           </a:ln>
           <a:effectLst/>
@@ -10895,120 +10693,20 @@
       </p:sp>
       <p:sp>
         <p:nvSpPr>
-          <p:cNvPr id="24" name="TextBox 23"/>
-          <p:cNvSpPr txBox="1"/>
-          <p:nvPr/>
-        </p:nvSpPr>
-        <p:spPr>
-          <a:xfrm>
-            <a:off x="13487400" y="3929062"/>
-            <a:ext cx="3314700" cy="304800"/>
-          </a:xfrm>
-          <a:prstGeom prst="rect">
-            <a:avLst/>
-          </a:prstGeom>
-          <a:noFill/>
-        </p:spPr>
-        <p:txBody>
-          <a:bodyPr wrap="square" lIns="0" rIns="0" tIns="0" bIns="0" anchor="t">
-            <a:spAutoFit/>
-          </a:bodyPr>
-          <a:lstStyle/>
-          <a:p>
-            <a:pPr algn="l">
-              <a:lnSpc>
-                <a:spcPct val="100000"/>
-              </a:lnSpc>
-            </a:pPr>
-            <a:r>
-              <a:rPr sz="1800" b="1" spc="190">
-                <a:solidFill>
-                  <a:srgbClr val="1E5BC6"/>
-                </a:solidFill>
-                <a:latin typeface="Pretendard"/>
-                <a:ea typeface="Pretendard"/>
-                <a:cs typeface="Pretendard"/>
-              </a:rPr>
-              <a:t>두 숫자</a:t>
-            </a:r>
-          </a:p>
-        </p:txBody>
-      </p:sp>
-      <p:sp>
-        <p:nvSpPr>
-          <p:cNvPr id="25" name="TextBox 24"/>
-          <p:cNvSpPr txBox="1"/>
-          <p:nvPr/>
-        </p:nvSpPr>
-        <p:spPr>
-          <a:xfrm>
-            <a:off x="13487400" y="4329112"/>
-            <a:ext cx="3314700" cy="1238250"/>
-          </a:xfrm>
-          <a:prstGeom prst="rect">
-            <a:avLst/>
-          </a:prstGeom>
-          <a:noFill/>
-        </p:spPr>
-        <p:txBody>
-          <a:bodyPr wrap="square" lIns="0" rIns="0" tIns="0" bIns="0" anchor="t">
-            <a:spAutoFit/>
-          </a:bodyPr>
-          <a:lstStyle/>
-          <a:p>
-            <a:pPr algn="l">
-              <a:lnSpc>
-                <a:spcPct val="138000"/>
-              </a:lnSpc>
-            </a:pPr>
-            <a:r>
-              <a:rPr sz="2700" b="1">
-                <a:solidFill>
-                  <a:srgbClr val="0D2B5E"/>
-                </a:solidFill>
-                <a:latin typeface="Pretendard"/>
-                <a:ea typeface="Pretendard"/>
-                <a:cs typeface="Pretendard"/>
-              </a:rPr>
-              <a:t>3 = 3</a:t>
-            </a:r>
-          </a:p>
-          <a:p>
-            <a:pPr algn="l">
-              <a:lnSpc>
-                <a:spcPct val="138000"/>
-              </a:lnSpc>
-            </a:pPr>
-            <a:r>
-              <a:rPr sz="2700" b="1">
-                <a:solidFill>
-                  <a:srgbClr val="0D2B5E"/>
-                </a:solidFill>
-                <a:latin typeface="Pretendard"/>
-                <a:ea typeface="Pretendard"/>
-                <a:cs typeface="Pretendard"/>
-              </a:rPr>
-              <a:t>이면 안전</a:t>
-            </a:r>
-          </a:p>
-        </p:txBody>
-      </p:sp>
-      <p:sp>
-        <p:nvSpPr>
-          <p:cNvPr id="26" name="Rectangle 25"/>
+          <p:cNvPr id="22" name="Rectangle 21"/>
           <p:cNvSpPr/>
           <p:nvPr/>
         </p:nvSpPr>
         <p:spPr>
           <a:xfrm>
-            <a:off x="1143000" y="8058150"/>
-            <a:ext cx="16002000" cy="9525"/>
-          </a:xfrm>
-          <a:prstGeom prst="rect">
-            <a:avLst/>
-          </a:prstGeom>
-          <a:solidFill>
-            <a:srgbClr val="DCE1E8"/>
+            <a:off x="10972800" y="3924300"/>
+            <a:ext cx="2895600" cy="914400"/>
+          </a:xfrm>
+          <a:prstGeom prst="rect">
+            <a:avLst/>
+          </a:prstGeom>
+          <a:solidFill>
+            <a:srgbClr val="1E5BC6"/>
           </a:solidFill>
           <a:ln>
             <a:noFill/>
@@ -11025,7 +10723,301 @@
       </p:sp>
       <p:sp>
         <p:nvSpPr>
+          <p:cNvPr id="23" name="TextBox 22"/>
+          <p:cNvSpPr txBox="1"/>
+          <p:nvPr/>
+        </p:nvSpPr>
+        <p:spPr>
+          <a:xfrm>
+            <a:off x="10972800" y="4171950"/>
+            <a:ext cx="2895600" cy="419100"/>
+          </a:xfrm>
+          <a:prstGeom prst="rect">
+            <a:avLst/>
+          </a:prstGeom>
+          <a:noFill/>
+        </p:spPr>
+        <p:txBody>
+          <a:bodyPr wrap="square" lIns="0" rIns="0" tIns="0" bIns="0" anchor="t">
+            <a:spAutoFit/>
+          </a:bodyPr>
+          <a:lstStyle/>
+          <a:p>
+            <a:pPr algn="ctr">
+              <a:lnSpc>
+                <a:spcPct val="100000"/>
+              </a:lnSpc>
+            </a:pPr>
+            <a:r>
+              <a:rPr sz="2475" b="1">
+                <a:solidFill>
+                  <a:srgbClr val="FFFFFF"/>
+                </a:solidFill>
+                <a:latin typeface="Pretendard"/>
+                <a:ea typeface="Pretendard"/>
+                <a:cs typeface="Pretendard"/>
+              </a:rPr>
+              <a:t>4. 처방</a:t>
+            </a:r>
+          </a:p>
+        </p:txBody>
+      </p:sp>
+      <p:sp>
+        <p:nvSpPr>
+          <p:cNvPr id="24" name="TextBox 23"/>
+          <p:cNvSpPr txBox="1"/>
+          <p:nvPr/>
+        </p:nvSpPr>
+        <p:spPr>
+          <a:xfrm>
+            <a:off x="11182350" y="5143500"/>
+            <a:ext cx="2476500" cy="1524000"/>
+          </a:xfrm>
+          <a:prstGeom prst="rect">
+            <a:avLst/>
+          </a:prstGeom>
+          <a:noFill/>
+        </p:spPr>
+        <p:txBody>
+          <a:bodyPr wrap="square" lIns="0" rIns="0" tIns="0" bIns="0" anchor="t">
+            <a:spAutoFit/>
+          </a:bodyPr>
+          <a:lstStyle/>
+          <a:p>
+            <a:pPr algn="ctr">
+              <a:lnSpc>
+                <a:spcPct val="146000"/>
+              </a:lnSpc>
+            </a:pPr>
+            <a:r>
+              <a:rPr sz="2100" b="0">
+                <a:solidFill>
+                  <a:srgbClr val="3D3D3D"/>
+                </a:solidFill>
+                <a:latin typeface="Pretendard"/>
+                <a:ea typeface="Pretendard"/>
+                <a:cs typeface="Pretendard"/>
+              </a:rPr>
+              <a:t>on="product_id"</a:t>
+            </a:r>
+          </a:p>
+          <a:p>
+            <a:pPr algn="ctr">
+              <a:lnSpc>
+                <a:spcPct val="146000"/>
+              </a:lnSpc>
+            </a:pPr>
+            <a:r>
+              <a:rPr sz="2100" b="0">
+                <a:solidFill>
+                  <a:srgbClr val="3D3D3D"/>
+                </a:solidFill>
+                <a:latin typeface="Pretendard"/>
+                <a:ea typeface="Pretendard"/>
+                <a:cs typeface="Pretendard"/>
+              </a:rPr>
+              <a:t>또는 alias</a:t>
+            </a:r>
+          </a:p>
+        </p:txBody>
+      </p:sp>
+      <p:sp>
+        <p:nvSpPr>
+          <p:cNvPr id="25" name="Rounded Rectangle 24"/>
+          <p:cNvSpPr/>
+          <p:nvPr/>
+        </p:nvSpPr>
+        <p:spPr>
+          <a:xfrm>
+            <a:off x="14249400" y="3924300"/>
+            <a:ext cx="2895600" cy="3143250"/>
+          </a:xfrm>
+          <a:prstGeom prst="roundRect">
+            <a:avLst>
+              <a:gd name="adj" fmla="val 1644"/>
+            </a:avLst>
+          </a:prstGeom>
+          <a:solidFill>
+            <a:srgbClr val="FAFBFD"/>
+          </a:solidFill>
+          <a:ln w="9525">
+            <a:solidFill>
+              <a:srgbClr val="DCE1E8"/>
+            </a:solidFill>
+          </a:ln>
+          <a:effectLst/>
+        </p:spPr>
+        <p:txBody>
+          <a:bodyPr rtlCol="0" anchor="ctr" wrap="square"/>
+          <a:lstStyle/>
+          <a:p>
+            <a:pPr algn="ctr"/>
+          </a:p>
+        </p:txBody>
+      </p:sp>
+      <p:sp>
+        <p:nvSpPr>
+          <p:cNvPr id="26" name="Rectangle 25"/>
+          <p:cNvSpPr/>
+          <p:nvPr/>
+        </p:nvSpPr>
+        <p:spPr>
+          <a:xfrm>
+            <a:off x="14249400" y="3924300"/>
+            <a:ext cx="2895600" cy="914400"/>
+          </a:xfrm>
+          <a:prstGeom prst="rect">
+            <a:avLst/>
+          </a:prstGeom>
+          <a:solidFill>
+            <a:srgbClr val="0D2B5E"/>
+          </a:solidFill>
+          <a:ln>
+            <a:noFill/>
+          </a:ln>
+          <a:effectLst/>
+        </p:spPr>
+        <p:txBody>
+          <a:bodyPr rtlCol="0" anchor="ctr" wrap="square"/>
+          <a:lstStyle/>
+          <a:p>
+            <a:pPr algn="ctr"/>
+          </a:p>
+        </p:txBody>
+      </p:sp>
+      <p:sp>
+        <p:nvSpPr>
           <p:cNvPr id="27" name="TextBox 26"/>
+          <p:cNvSpPr txBox="1"/>
+          <p:nvPr/>
+        </p:nvSpPr>
+        <p:spPr>
+          <a:xfrm>
+            <a:off x="14249400" y="4171950"/>
+            <a:ext cx="2895600" cy="419100"/>
+          </a:xfrm>
+          <a:prstGeom prst="rect">
+            <a:avLst/>
+          </a:prstGeom>
+          <a:noFill/>
+        </p:spPr>
+        <p:txBody>
+          <a:bodyPr wrap="square" lIns="0" rIns="0" tIns="0" bIns="0" anchor="t">
+            <a:spAutoFit/>
+          </a:bodyPr>
+          <a:lstStyle/>
+          <a:p>
+            <a:pPr algn="ctr">
+              <a:lnSpc>
+                <a:spcPct val="100000"/>
+              </a:lnSpc>
+            </a:pPr>
+            <a:r>
+              <a:rPr sz="2475" b="1">
+                <a:solidFill>
+                  <a:srgbClr val="FFFFFF"/>
+                </a:solidFill>
+                <a:latin typeface="Pretendard"/>
+                <a:ea typeface="Pretendard"/>
+                <a:cs typeface="Pretendard"/>
+              </a:rPr>
+              <a:t>5. 한 번 더</a:t>
+            </a:r>
+          </a:p>
+        </p:txBody>
+      </p:sp>
+      <p:sp>
+        <p:nvSpPr>
+          <p:cNvPr id="28" name="TextBox 27"/>
+          <p:cNvSpPr txBox="1"/>
+          <p:nvPr/>
+        </p:nvSpPr>
+        <p:spPr>
+          <a:xfrm>
+            <a:off x="14458950" y="5143500"/>
+            <a:ext cx="2476500" cy="1524000"/>
+          </a:xfrm>
+          <a:prstGeom prst="rect">
+            <a:avLst/>
+          </a:prstGeom>
+          <a:noFill/>
+        </p:spPr>
+        <p:txBody>
+          <a:bodyPr wrap="square" lIns="0" rIns="0" tIns="0" bIns="0" anchor="t">
+            <a:spAutoFit/>
+          </a:bodyPr>
+          <a:lstStyle/>
+          <a:p>
+            <a:pPr algn="ctr">
+              <a:lnSpc>
+                <a:spcPct val="146000"/>
+              </a:lnSpc>
+            </a:pPr>
+            <a:r>
+              <a:rPr sz="2100" b="0">
+                <a:solidFill>
+                  <a:srgbClr val="3D3D3D"/>
+                </a:solidFill>
+                <a:latin typeface="Pretendard"/>
+                <a:ea typeface="Pretendard"/>
+                <a:cs typeface="Pretendard"/>
+              </a:rPr>
+              <a:t>joined 에 amount</a:t>
+            </a:r>
+          </a:p>
+          <a:p>
+            <a:pPr algn="ctr">
+              <a:lnSpc>
+                <a:spcPct val="146000"/>
+              </a:lnSpc>
+            </a:pPr>
+            <a:r>
+              <a:rPr sz="2100" b="0">
+                <a:solidFill>
+                  <a:srgbClr val="3D3D3D"/>
+                </a:solidFill>
+                <a:latin typeface="Pretendard"/>
+                <a:ea typeface="Pretendard"/>
+                <a:cs typeface="Pretendard"/>
+              </a:rPr>
+              <a:t>→ cannot resolve</a:t>
+            </a:r>
+          </a:p>
+        </p:txBody>
+      </p:sp>
+      <p:sp>
+        <p:nvSpPr>
+          <p:cNvPr id="29" name="Rectangle 28"/>
+          <p:cNvSpPr/>
+          <p:nvPr/>
+        </p:nvSpPr>
+        <p:spPr>
+          <a:xfrm>
+            <a:off x="1143000" y="8058150"/>
+            <a:ext cx="16002000" cy="9525"/>
+          </a:xfrm>
+          <a:prstGeom prst="rect">
+            <a:avLst/>
+          </a:prstGeom>
+          <a:solidFill>
+            <a:srgbClr val="DCE1E8"/>
+          </a:solidFill>
+          <a:ln>
+            <a:noFill/>
+          </a:ln>
+          <a:effectLst/>
+        </p:spPr>
+        <p:txBody>
+          <a:bodyPr rtlCol="0" anchor="ctr" wrap="square"/>
+          <a:lstStyle/>
+          <a:p>
+            <a:pPr algn="ctr"/>
+          </a:p>
+        </p:txBody>
+      </p:sp>
+      <p:sp>
+        <p:nvSpPr>
+          <p:cNvPr id="30" name="TextBox 29"/>
           <p:cNvSpPr txBox="1"/>
           <p:nvPr/>
         </p:nvSpPr>
@@ -11066,7 +11058,7 @@
       </p:sp>
       <p:sp>
         <p:nvSpPr>
-          <p:cNvPr id="28" name="TextBox 27"/>
+          <p:cNvPr id="31" name="TextBox 30"/>
           <p:cNvSpPr txBox="1"/>
           <p:nvPr/>
         </p:nvSpPr>
@@ -11125,7 +11117,7 @@
       <p:grpSpPr/>
       <p:sp>
         <p:nvSpPr>
-          <p:cNvPr id="2" name="Oval 1"/>
+          <p:cNvPr id="2" name="deckgen:decor"/>
           <p:cNvSpPr/>
           <p:nvPr/>
         </p:nvSpPr>
@@ -11155,7 +11147,7 @@
       </p:sp>
       <p:sp>
         <p:nvSpPr>
-          <p:cNvPr id="3" name="Oval 2"/>
+          <p:cNvPr id="3" name="deckgen:decor"/>
           <p:cNvSpPr/>
           <p:nvPr/>
         </p:nvSpPr>
@@ -11185,7 +11177,7 @@
       </p:sp>
       <p:sp>
         <p:nvSpPr>
-          <p:cNvPr id="4" name="Oval 3"/>
+          <p:cNvPr id="4" name="deckgen:decor"/>
           <p:cNvSpPr/>
           <p:nvPr/>
         </p:nvSpPr>
@@ -11249,7 +11241,7 @@
                 <a:ea typeface="Pretendard"/>
                 <a:cs typeface="Pretendard"/>
               </a:rPr>
-              <a:t>일부러 실패시키기</a:t>
+              <a:t>4단계 · 일부러 실패시키기</a:t>
             </a:r>
           </a:p>
         </p:txBody>
@@ -11290,7 +11282,7 @@
                 <a:ea typeface="Pretendard"/>
                 <a:cs typeface="Pretendard"/>
               </a:rPr>
-              <a:t>조인 키를 조건식으로 주면 — ambiguous</a:t>
+              <a:t>두 오류 — ambiguous 와 cannot resolve</a:t>
             </a:r>
           </a:p>
         </p:txBody>
@@ -11333,8 +11325,8 @@
         </p:nvSpPr>
         <p:spPr>
           <a:xfrm>
-            <a:off x="1143000" y="3067050"/>
-            <a:ext cx="16002000" cy="438150"/>
+            <a:off x="1143000" y="2857500"/>
+            <a:ext cx="7372350" cy="533400"/>
           </a:xfrm>
           <a:prstGeom prst="rect">
             <a:avLst/>
@@ -11349,11 +11341,52 @@
           <a:p>
             <a:pPr algn="l">
               <a:lnSpc>
-                <a:spcPct val="130000"/>
-              </a:lnSpc>
-            </a:pPr>
-            <a:r>
-              <a:rPr sz="2550" b="1">
+                <a:spcPct val="110000"/>
+              </a:lnSpc>
+            </a:pPr>
+            <a:r>
+              <a:rPr sz="3150" b="1">
+                <a:solidFill>
+                  <a:srgbClr val="0D2B5E"/>
+                </a:solidFill>
+                <a:latin typeface="Pretendard"/>
+                <a:ea typeface="Pretendard"/>
+                <a:cs typeface="Pretendard"/>
+              </a:rPr>
+              <a:t>[AMBIGUOUS_REFERENCE]</a:t>
+            </a:r>
+          </a:p>
+        </p:txBody>
+      </p:sp>
+      <p:sp>
+        <p:nvSpPr>
+          <p:cNvPr id="9" name="TextBox 8"/>
+          <p:cNvSpPr txBox="1"/>
+          <p:nvPr/>
+        </p:nvSpPr>
+        <p:spPr>
+          <a:xfrm>
+            <a:off x="1143000" y="3467100"/>
+            <a:ext cx="7372350" cy="876300"/>
+          </a:xfrm>
+          <a:prstGeom prst="rect">
+            <a:avLst/>
+          </a:prstGeom>
+          <a:noFill/>
+        </p:spPr>
+        <p:txBody>
+          <a:bodyPr wrap="square" lIns="0" rIns="0" tIns="0" bIns="0" anchor="t">
+            <a:spAutoFit/>
+          </a:bodyPr>
+          <a:lstStyle/>
+          <a:p>
+            <a:pPr algn="l">
+              <a:lnSpc>
+                <a:spcPct val="146000"/>
+              </a:lnSpc>
+            </a:pPr>
+            <a:r>
+              <a:rPr sz="2250" b="0">
                 <a:solidFill>
                   <a:srgbClr val="3D3D3D"/>
                 </a:solidFill>
@@ -11361,25 +11394,25 @@
                 <a:ea typeface="Pretendard"/>
                 <a:cs typeface="Pretendard"/>
               </a:rPr>
-              <a:t>이론의 「키를 문자열로」가 왜 규칙인지 — 오류를 한 번 직접 봅니다</a:t>
-            </a:r>
-          </a:p>
-        </p:txBody>
-      </p:sp>
-      <p:sp>
-        <p:nvSpPr>
-          <p:cNvPr id="9" name="Rounded Rectangle 8"/>
+              <a:t>Reference `product_id` is ambiguous</a:t>
+            </a:r>
+          </a:p>
+        </p:txBody>
+      </p:sp>
+      <p:sp>
+        <p:nvSpPr>
+          <p:cNvPr id="10" name="Rounded Rectangle 9"/>
           <p:cNvSpPr/>
           <p:nvPr/>
         </p:nvSpPr>
         <p:spPr>
           <a:xfrm>
-            <a:off x="1143000" y="3924300"/>
-            <a:ext cx="2895600" cy="3143250"/>
+            <a:off x="1143000" y="4610100"/>
+            <a:ext cx="7372350" cy="2857500"/>
           </a:xfrm>
           <a:prstGeom prst="roundRect">
             <a:avLst>
-              <a:gd name="adj" fmla="val 1644"/>
+              <a:gd name="adj" fmla="val 1666"/>
             </a:avLst>
           </a:prstGeom>
           <a:solidFill>
@@ -11402,20 +11435,20 @@
       </p:sp>
       <p:sp>
         <p:nvSpPr>
-          <p:cNvPr id="10" name="Rectangle 9"/>
+          <p:cNvPr id="11" name="Oval 10"/>
           <p:cNvSpPr/>
           <p:nvPr/>
         </p:nvSpPr>
         <p:spPr>
           <a:xfrm>
-            <a:off x="1143000" y="3924300"/>
-            <a:ext cx="2895600" cy="914400"/>
-          </a:xfrm>
-          <a:prstGeom prst="rect">
-            <a:avLst/>
-          </a:prstGeom>
-          <a:solidFill>
-            <a:srgbClr val="0D2B5E"/>
+            <a:off x="1447800" y="5016817"/>
+            <a:ext cx="97155" cy="97155"/>
+          </a:xfrm>
+          <a:prstGeom prst="ellipse">
+            <a:avLst/>
+          </a:prstGeom>
+          <a:solidFill>
+            <a:srgbClr val="1E5BC6"/>
           </a:solidFill>
           <a:ln>
             <a:noFill/>
@@ -11432,14 +11465,197 @@
       </p:sp>
       <p:sp>
         <p:nvSpPr>
-          <p:cNvPr id="11" name="TextBox 10"/>
-          <p:cNvSpPr txBox="1"/>
-          <p:nvPr/>
-        </p:nvSpPr>
-        <p:spPr>
-          <a:xfrm>
-            <a:off x="1143000" y="4171950"/>
-            <a:ext cx="2895600" cy="419100"/>
+          <p:cNvPr id="12" name="TextBox 11"/>
+          <p:cNvSpPr txBox="1"/>
+          <p:nvPr/>
+        </p:nvSpPr>
+        <p:spPr>
+          <a:xfrm>
+            <a:off x="1633538" y="4838700"/>
+            <a:ext cx="6634162" cy="453390"/>
+          </a:xfrm>
+          <a:prstGeom prst="rect">
+            <a:avLst/>
+          </a:prstGeom>
+          <a:noFill/>
+        </p:spPr>
+        <p:txBody>
+          <a:bodyPr wrap="square" lIns="0" rIns="0" tIns="0" bIns="0" anchor="ctr">
+            <a:spAutoFit/>
+          </a:bodyPr>
+          <a:lstStyle/>
+          <a:p>
+            <a:pPr algn="l">
+              <a:lnSpc>
+                <a:spcPct val="120000"/>
+              </a:lnSpc>
+            </a:pPr>
+            <a:r>
+              <a:rPr sz="1575" b="0">
+                <a:solidFill>
+                  <a:srgbClr val="3D3D3D"/>
+                </a:solidFill>
+                <a:latin typeface="Pretendard"/>
+                <a:ea typeface="Pretendard"/>
+                <a:cs typeface="Pretendard"/>
+              </a:rPr>
+              <a:t>원인: 조건식 조인은 두 컬럼을 다 남긴다</a:t>
+            </a:r>
+          </a:p>
+        </p:txBody>
+      </p:sp>
+      <p:sp>
+        <p:nvSpPr>
+          <p:cNvPr id="13" name="Oval 12"/>
+          <p:cNvSpPr/>
+          <p:nvPr/>
+        </p:nvSpPr>
+        <p:spPr>
+          <a:xfrm>
+            <a:off x="1447800" y="5527358"/>
+            <a:ext cx="97155" cy="97155"/>
+          </a:xfrm>
+          <a:prstGeom prst="ellipse">
+            <a:avLst/>
+          </a:prstGeom>
+          <a:solidFill>
+            <a:srgbClr val="1E5BC6"/>
+          </a:solidFill>
+          <a:ln>
+            <a:noFill/>
+          </a:ln>
+          <a:effectLst/>
+        </p:spPr>
+        <p:txBody>
+          <a:bodyPr rtlCol="0" anchor="ctr" wrap="square"/>
+          <a:lstStyle/>
+          <a:p>
+            <a:pPr algn="ctr"/>
+          </a:p>
+        </p:txBody>
+      </p:sp>
+      <p:sp>
+        <p:nvSpPr>
+          <p:cNvPr id="14" name="TextBox 13"/>
+          <p:cNvSpPr txBox="1"/>
+          <p:nvPr/>
+        </p:nvSpPr>
+        <p:spPr>
+          <a:xfrm>
+            <a:off x="1633538" y="5349240"/>
+            <a:ext cx="6634162" cy="453390"/>
+          </a:xfrm>
+          <a:prstGeom prst="rect">
+            <a:avLst/>
+          </a:prstGeom>
+          <a:noFill/>
+        </p:spPr>
+        <p:txBody>
+          <a:bodyPr wrap="square" lIns="0" rIns="0" tIns="0" bIns="0" anchor="ctr">
+            <a:spAutoFit/>
+          </a:bodyPr>
+          <a:lstStyle/>
+          <a:p>
+            <a:pPr algn="l">
+              <a:lnSpc>
+                <a:spcPct val="120000"/>
+              </a:lnSpc>
+            </a:pPr>
+            <a:r>
+              <a:rPr sz="1575" b="0">
+                <a:solidFill>
+                  <a:srgbClr val="3D3D3D"/>
+                </a:solidFill>
+                <a:latin typeface="Pretendard"/>
+                <a:ea typeface="Pretendard"/>
+                <a:cs typeface="Pretendard"/>
+              </a:rPr>
+              <a:t>처방 1: on="product_id" 문자열로</a:t>
+            </a:r>
+          </a:p>
+        </p:txBody>
+      </p:sp>
+      <p:sp>
+        <p:nvSpPr>
+          <p:cNvPr id="15" name="Oval 14"/>
+          <p:cNvSpPr/>
+          <p:nvPr/>
+        </p:nvSpPr>
+        <p:spPr>
+          <a:xfrm>
+            <a:off x="1447800" y="6037898"/>
+            <a:ext cx="97155" cy="97155"/>
+          </a:xfrm>
+          <a:prstGeom prst="ellipse">
+            <a:avLst/>
+          </a:prstGeom>
+          <a:solidFill>
+            <a:srgbClr val="1E5BC6"/>
+          </a:solidFill>
+          <a:ln>
+            <a:noFill/>
+          </a:ln>
+          <a:effectLst/>
+        </p:spPr>
+        <p:txBody>
+          <a:bodyPr rtlCol="0" anchor="ctr" wrap="square"/>
+          <a:lstStyle/>
+          <a:p>
+            <a:pPr algn="ctr"/>
+          </a:p>
+        </p:txBody>
+      </p:sp>
+      <p:sp>
+        <p:nvSpPr>
+          <p:cNvPr id="16" name="TextBox 15"/>
+          <p:cNvSpPr txBox="1"/>
+          <p:nvPr/>
+        </p:nvSpPr>
+        <p:spPr>
+          <a:xfrm>
+            <a:off x="1633538" y="5859780"/>
+            <a:ext cx="6634162" cy="453390"/>
+          </a:xfrm>
+          <a:prstGeom prst="rect">
+            <a:avLst/>
+          </a:prstGeom>
+          <a:noFill/>
+        </p:spPr>
+        <p:txBody>
+          <a:bodyPr wrap="square" lIns="0" rIns="0" tIns="0" bIns="0" anchor="ctr">
+            <a:spAutoFit/>
+          </a:bodyPr>
+          <a:lstStyle/>
+          <a:p>
+            <a:pPr algn="l">
+              <a:lnSpc>
+                <a:spcPct val="120000"/>
+              </a:lnSpc>
+            </a:pPr>
+            <a:r>
+              <a:rPr sz="1575" b="0">
+                <a:solidFill>
+                  <a:srgbClr val="3D3D3D"/>
+                </a:solidFill>
+                <a:latin typeface="Pretendard"/>
+                <a:ea typeface="Pretendard"/>
+                <a:cs typeface="Pretendard"/>
+              </a:rPr>
+              <a:t>처방 2: alias("o")·alias("p") 로 출처 명시</a:t>
+            </a:r>
+          </a:p>
+        </p:txBody>
+      </p:sp>
+      <p:sp>
+        <p:nvSpPr>
+          <p:cNvPr id="17" name="TextBox 16"/>
+          <p:cNvSpPr txBox="1"/>
+          <p:nvPr/>
+        </p:nvSpPr>
+        <p:spPr>
+          <a:xfrm>
+            <a:off x="9772650" y="2857500"/>
+            <a:ext cx="7372350" cy="533400"/>
           </a:xfrm>
           <a:prstGeom prst="rect">
             <a:avLst/>
@@ -11452,35 +11668,35 @@
           </a:bodyPr>
           <a:lstStyle/>
           <a:p>
-            <a:pPr algn="ctr">
-              <a:lnSpc>
-                <a:spcPct val="100000"/>
-              </a:lnSpc>
-            </a:pPr>
-            <a:r>
-              <a:rPr sz="2475" b="1">
-                <a:solidFill>
-                  <a:srgbClr val="FFFFFF"/>
-                </a:solidFill>
-                <a:latin typeface="Pretendard"/>
-                <a:ea typeface="Pretendard"/>
-                <a:cs typeface="Pretendard"/>
-              </a:rPr>
-              <a:t>1. 조건식 조인</a:t>
-            </a:r>
-          </a:p>
-        </p:txBody>
-      </p:sp>
-      <p:sp>
-        <p:nvSpPr>
-          <p:cNvPr id="12" name="TextBox 11"/>
-          <p:cNvSpPr txBox="1"/>
-          <p:nvPr/>
-        </p:nvSpPr>
-        <p:spPr>
-          <a:xfrm>
-            <a:off x="1352550" y="5143500"/>
-            <a:ext cx="2476500" cy="1524000"/>
+            <a:pPr algn="l">
+              <a:lnSpc>
+                <a:spcPct val="110000"/>
+              </a:lnSpc>
+            </a:pPr>
+            <a:r>
+              <a:rPr sz="3150" b="1">
+                <a:solidFill>
+                  <a:srgbClr val="0D2B5E"/>
+                </a:solidFill>
+                <a:latin typeface="Pretendard"/>
+                <a:ea typeface="Pretendard"/>
+                <a:cs typeface="Pretendard"/>
+              </a:rPr>
+              <a:t>[UNRESOLVED_COLUMN…]</a:t>
+            </a:r>
+          </a:p>
+        </p:txBody>
+      </p:sp>
+      <p:sp>
+        <p:nvSpPr>
+          <p:cNvPr id="18" name="TextBox 17"/>
+          <p:cNvSpPr txBox="1"/>
+          <p:nvPr/>
+        </p:nvSpPr>
+        <p:spPr>
+          <a:xfrm>
+            <a:off x="9772650" y="3467100"/>
+            <a:ext cx="7372350" cy="876300"/>
           </a:xfrm>
           <a:prstGeom prst="rect">
             <a:avLst/>
@@ -11493,13 +11709,13 @@
           </a:bodyPr>
           <a:lstStyle/>
           <a:p>
-            <a:pPr algn="ctr">
+            <a:pPr algn="l">
               <a:lnSpc>
                 <a:spcPct val="146000"/>
               </a:lnSpc>
             </a:pPr>
             <a:r>
-              <a:rPr sz="2100" b="0">
+              <a:rPr sz="2250" b="0">
                 <a:solidFill>
                   <a:srgbClr val="3D3D3D"/>
                 </a:solidFill>
@@ -11507,43 +11723,25 @@
                 <a:ea typeface="Pretendard"/>
                 <a:cs typeface="Pretendard"/>
               </a:rPr>
-              <a:t>a["k"] == b["k"]</a:t>
-            </a:r>
-          </a:p>
-          <a:p>
-            <a:pPr algn="ctr">
-              <a:lnSpc>
-                <a:spcPct val="146000"/>
-              </a:lnSpc>
-            </a:pPr>
-            <a:r>
-              <a:rPr sz="2100" b="0">
-                <a:solidFill>
-                  <a:srgbClr val="3D3D3D"/>
-                </a:solidFill>
-                <a:latin typeface="Pretendard"/>
-                <a:ea typeface="Pretendard"/>
-                <a:cs typeface="Pretendard"/>
-              </a:rPr>
-              <a:t>형태로</a:t>
-            </a:r>
-          </a:p>
-        </p:txBody>
-      </p:sp>
-      <p:sp>
-        <p:nvSpPr>
-          <p:cNvPr id="13" name="Rounded Rectangle 12"/>
+              <a:t>`amount` cannot be resolved</a:t>
+            </a:r>
+          </a:p>
+        </p:txBody>
+      </p:sp>
+      <p:sp>
+        <p:nvSpPr>
+          <p:cNvPr id="19" name="Rounded Rectangle 18"/>
           <p:cNvSpPr/>
           <p:nvPr/>
         </p:nvSpPr>
         <p:spPr>
           <a:xfrm>
-            <a:off x="4419600" y="3924300"/>
-            <a:ext cx="2895600" cy="3143250"/>
+            <a:off x="9772650" y="4610100"/>
+            <a:ext cx="7372350" cy="2857500"/>
           </a:xfrm>
           <a:prstGeom prst="roundRect">
             <a:avLst>
-              <a:gd name="adj" fmla="val 1644"/>
+              <a:gd name="adj" fmla="val 1666"/>
             </a:avLst>
           </a:prstGeom>
           <a:solidFill>
@@ -11566,16 +11764,16 @@
       </p:sp>
       <p:sp>
         <p:nvSpPr>
-          <p:cNvPr id="14" name="Rectangle 13"/>
+          <p:cNvPr id="20" name="Oval 19"/>
           <p:cNvSpPr/>
           <p:nvPr/>
         </p:nvSpPr>
         <p:spPr>
           <a:xfrm>
-            <a:off x="4419600" y="3924300"/>
-            <a:ext cx="2895600" cy="914400"/>
-          </a:xfrm>
-          <a:prstGeom prst="rect">
+            <a:off x="10077450" y="5016817"/>
+            <a:ext cx="97155" cy="97155"/>
+          </a:xfrm>
+          <a:prstGeom prst="ellipse">
             <a:avLst/>
           </a:prstGeom>
           <a:solidFill>
@@ -11596,74 +11794,33 @@
       </p:sp>
       <p:sp>
         <p:nvSpPr>
-          <p:cNvPr id="15" name="TextBox 14"/>
-          <p:cNvSpPr txBox="1"/>
-          <p:nvPr/>
-        </p:nvSpPr>
-        <p:spPr>
-          <a:xfrm>
-            <a:off x="4419600" y="4171950"/>
-            <a:ext cx="2895600" cy="419100"/>
-          </a:xfrm>
-          <a:prstGeom prst="rect">
-            <a:avLst/>
-          </a:prstGeom>
-          <a:noFill/>
-        </p:spPr>
-        <p:txBody>
-          <a:bodyPr wrap="square" lIns="0" rIns="0" tIns="0" bIns="0" anchor="t">
-            <a:spAutoFit/>
-          </a:bodyPr>
-          <a:lstStyle/>
-          <a:p>
-            <a:pPr algn="ctr">
-              <a:lnSpc>
-                <a:spcPct val="100000"/>
-              </a:lnSpc>
-            </a:pPr>
-            <a:r>
-              <a:rPr sz="2475" b="1">
-                <a:solidFill>
-                  <a:srgbClr val="FFFFFF"/>
-                </a:solidFill>
-                <a:latin typeface="Pretendard"/>
-                <a:ea typeface="Pretendard"/>
-                <a:cs typeface="Pretendard"/>
-              </a:rPr>
-              <a:t>2. 컬럼 선택</a:t>
-            </a:r>
-          </a:p>
-        </p:txBody>
-      </p:sp>
-      <p:sp>
-        <p:nvSpPr>
-          <p:cNvPr id="16" name="TextBox 15"/>
-          <p:cNvSpPr txBox="1"/>
-          <p:nvPr/>
-        </p:nvSpPr>
-        <p:spPr>
-          <a:xfrm>
-            <a:off x="4629150" y="5143500"/>
-            <a:ext cx="2476500" cy="1524000"/>
-          </a:xfrm>
-          <a:prstGeom prst="rect">
-            <a:avLst/>
-          </a:prstGeom>
-          <a:noFill/>
-        </p:spPr>
-        <p:txBody>
-          <a:bodyPr wrap="square" lIns="0" rIns="0" tIns="0" bIns="0" anchor="t">
-            <a:spAutoFit/>
-          </a:bodyPr>
-          <a:lstStyle/>
-          <a:p>
-            <a:pPr algn="ctr">
-              <a:lnSpc>
-                <a:spcPct val="146000"/>
-              </a:lnSpc>
-            </a:pPr>
-            <a:r>
-              <a:rPr sz="2100" b="0">
+          <p:cNvPr id="21" name="TextBox 20"/>
+          <p:cNvSpPr txBox="1"/>
+          <p:nvPr/>
+        </p:nvSpPr>
+        <p:spPr>
+          <a:xfrm>
+            <a:off x="10263188" y="4838700"/>
+            <a:ext cx="6634162" cy="453390"/>
+          </a:xfrm>
+          <a:prstGeom prst="rect">
+            <a:avLst/>
+          </a:prstGeom>
+          <a:noFill/>
+        </p:spPr>
+        <p:txBody>
+          <a:bodyPr wrap="square" lIns="0" rIns="0" tIns="0" bIns="0" anchor="ctr">
+            <a:spAutoFit/>
+          </a:bodyPr>
+          <a:lstStyle/>
+          <a:p>
+            <a:pPr algn="l">
+              <a:lnSpc>
+                <a:spcPct val="120000"/>
+              </a:lnSpc>
+            </a:pPr>
+            <a:r>
+              <a:rPr sz="1575" b="0">
                 <a:solidFill>
                   <a:srgbClr val="3D3D3D"/>
                 </a:solidFill>
@@ -11671,79 +11828,27 @@
                 <a:ea typeface="Pretendard"/>
                 <a:cs typeface="Pretendard"/>
               </a:rPr>
-              <a:t>select(</a:t>
-            </a:r>
-          </a:p>
-          <a:p>
-            <a:pPr algn="ctr">
-              <a:lnSpc>
-                <a:spcPct val="146000"/>
-              </a:lnSpc>
-            </a:pPr>
-            <a:r>
-              <a:rPr sz="2100" b="0">
-                <a:solidFill>
-                  <a:srgbClr val="3D3D3D"/>
-                </a:solidFill>
-                <a:latin typeface="Pretendard"/>
-                <a:ea typeface="Pretendard"/>
-                <a:cs typeface="Pretendard"/>
-              </a:rPr>
-              <a:t>"product_id")</a:t>
-            </a:r>
-          </a:p>
-        </p:txBody>
-      </p:sp>
-      <p:sp>
-        <p:nvSpPr>
-          <p:cNvPr id="17" name="Rounded Rectangle 16"/>
+              <a:t>원인: 가공 전 변수 joined 에는 amount 가 없다</a:t>
+            </a:r>
+          </a:p>
+        </p:txBody>
+      </p:sp>
+      <p:sp>
+        <p:nvSpPr>
+          <p:cNvPr id="22" name="Oval 21"/>
           <p:cNvSpPr/>
           <p:nvPr/>
         </p:nvSpPr>
         <p:spPr>
           <a:xfrm>
-            <a:off x="7696200" y="3924300"/>
-            <a:ext cx="2895600" cy="3143250"/>
-          </a:xfrm>
-          <a:prstGeom prst="roundRect">
-            <a:avLst>
-              <a:gd name="adj" fmla="val 1644"/>
-            </a:avLst>
-          </a:prstGeom>
-          <a:solidFill>
-            <a:srgbClr val="FAFBFD"/>
-          </a:solidFill>
-          <a:ln w="9525">
-            <a:solidFill>
-              <a:srgbClr val="DCE1E8"/>
-            </a:solidFill>
-          </a:ln>
-          <a:effectLst/>
-        </p:spPr>
-        <p:txBody>
-          <a:bodyPr rtlCol="0" anchor="ctr" wrap="square"/>
-          <a:lstStyle/>
-          <a:p>
-            <a:pPr algn="ctr"/>
-          </a:p>
-        </p:txBody>
-      </p:sp>
-      <p:sp>
-        <p:nvSpPr>
-          <p:cNvPr id="18" name="Rectangle 17"/>
-          <p:cNvSpPr/>
-          <p:nvPr/>
-        </p:nvSpPr>
-        <p:spPr>
-          <a:xfrm>
-            <a:off x="7696200" y="3924300"/>
-            <a:ext cx="2895600" cy="914400"/>
-          </a:xfrm>
-          <a:prstGeom prst="rect">
-            <a:avLst/>
-          </a:prstGeom>
-          <a:solidFill>
-            <a:srgbClr val="0D2B5E"/>
+            <a:off x="10077450" y="5527358"/>
+            <a:ext cx="97155" cy="97155"/>
+          </a:xfrm>
+          <a:prstGeom prst="ellipse">
+            <a:avLst/>
+          </a:prstGeom>
+          <a:solidFill>
+            <a:srgbClr val="1E5BC6"/>
           </a:solidFill>
           <a:ln>
             <a:noFill/>
@@ -11760,74 +11865,33 @@
       </p:sp>
       <p:sp>
         <p:nvSpPr>
-          <p:cNvPr id="19" name="TextBox 18"/>
-          <p:cNvSpPr txBox="1"/>
-          <p:nvPr/>
-        </p:nvSpPr>
-        <p:spPr>
-          <a:xfrm>
-            <a:off x="7696200" y="4171950"/>
-            <a:ext cx="2895600" cy="419100"/>
-          </a:xfrm>
-          <a:prstGeom prst="rect">
-            <a:avLst/>
-          </a:prstGeom>
-          <a:noFill/>
-        </p:spPr>
-        <p:txBody>
-          <a:bodyPr wrap="square" lIns="0" rIns="0" tIns="0" bIns="0" anchor="t">
-            <a:spAutoFit/>
-          </a:bodyPr>
-          <a:lstStyle/>
-          <a:p>
-            <a:pPr algn="ctr">
-              <a:lnSpc>
-                <a:spcPct val="100000"/>
-              </a:lnSpc>
-            </a:pPr>
-            <a:r>
-              <a:rPr sz="2475" b="1">
-                <a:solidFill>
-                  <a:srgbClr val="FFFFFF"/>
-                </a:solidFill>
-                <a:latin typeface="Pretendard"/>
-                <a:ea typeface="Pretendard"/>
-                <a:cs typeface="Pretendard"/>
-              </a:rPr>
-              <a:t>3. 오류</a:t>
-            </a:r>
-          </a:p>
-        </p:txBody>
-      </p:sp>
-      <p:sp>
-        <p:nvSpPr>
-          <p:cNvPr id="20" name="TextBox 19"/>
-          <p:cNvSpPr txBox="1"/>
-          <p:nvPr/>
-        </p:nvSpPr>
-        <p:spPr>
-          <a:xfrm>
-            <a:off x="7905750" y="5143500"/>
-            <a:ext cx="2476500" cy="1524000"/>
-          </a:xfrm>
-          <a:prstGeom prst="rect">
-            <a:avLst/>
-          </a:prstGeom>
-          <a:noFill/>
-        </p:spPr>
-        <p:txBody>
-          <a:bodyPr wrap="square" lIns="0" rIns="0" tIns="0" bIns="0" anchor="t">
-            <a:spAutoFit/>
-          </a:bodyPr>
-          <a:lstStyle/>
-          <a:p>
-            <a:pPr algn="ctr">
-              <a:lnSpc>
-                <a:spcPct val="146000"/>
-              </a:lnSpc>
-            </a:pPr>
-            <a:r>
-              <a:rPr sz="2100" b="0">
+          <p:cNvPr id="23" name="TextBox 22"/>
+          <p:cNvSpPr txBox="1"/>
+          <p:nvPr/>
+        </p:nvSpPr>
+        <p:spPr>
+          <a:xfrm>
+            <a:off x="10263188" y="5349240"/>
+            <a:ext cx="6634162" cy="453390"/>
+          </a:xfrm>
+          <a:prstGeom prst="rect">
+            <a:avLst/>
+          </a:prstGeom>
+          <a:noFill/>
+        </p:spPr>
+        <p:txBody>
+          <a:bodyPr wrap="square" lIns="0" rIns="0" tIns="0" bIns="0" anchor="ctr">
+            <a:spAutoFit/>
+          </a:bodyPr>
+          <a:lstStyle/>
+          <a:p>
+            <a:pPr algn="l">
+              <a:lnSpc>
+                <a:spcPct val="120000"/>
+              </a:lnSpc>
+            </a:pPr>
+            <a:r>
+              <a:rPr sz="1575" b="0">
                 <a:solidFill>
                   <a:srgbClr val="3D3D3D"/>
                 </a:solidFill>
@@ -11835,75 +11899,23 @@
                 <a:ea typeface="Pretendard"/>
                 <a:cs typeface="Pretendard"/>
               </a:rPr>
-              <a:t>Reference …</a:t>
-            </a:r>
-          </a:p>
-          <a:p>
-            <a:pPr algn="ctr">
-              <a:lnSpc>
-                <a:spcPct val="146000"/>
-              </a:lnSpc>
-            </a:pPr>
-            <a:r>
-              <a:rPr sz="2100" b="0">
-                <a:solidFill>
-                  <a:srgbClr val="3D3D3D"/>
-                </a:solidFill>
-                <a:latin typeface="Pretendard"/>
-                <a:ea typeface="Pretendard"/>
-                <a:cs typeface="Pretendard"/>
-              </a:rPr>
-              <a:t>is ambiguous</a:t>
-            </a:r>
-          </a:p>
-        </p:txBody>
-      </p:sp>
-      <p:sp>
-        <p:nvSpPr>
-          <p:cNvPr id="21" name="Rounded Rectangle 20"/>
+              <a:t>.WITH_SUGGESTION — 그 시점의 컬럼 후보</a:t>
+            </a:r>
+          </a:p>
+        </p:txBody>
+      </p:sp>
+      <p:sp>
+        <p:nvSpPr>
+          <p:cNvPr id="24" name="Oval 23"/>
           <p:cNvSpPr/>
           <p:nvPr/>
         </p:nvSpPr>
         <p:spPr>
           <a:xfrm>
-            <a:off x="10972800" y="3924300"/>
-            <a:ext cx="2895600" cy="3143250"/>
-          </a:xfrm>
-          <a:prstGeom prst="roundRect">
-            <a:avLst>
-              <a:gd name="adj" fmla="val 1644"/>
-            </a:avLst>
-          </a:prstGeom>
-          <a:solidFill>
-            <a:srgbClr val="FAFBFD"/>
-          </a:solidFill>
-          <a:ln w="9525">
-            <a:solidFill>
-              <a:srgbClr val="DCE1E8"/>
-            </a:solidFill>
-          </a:ln>
-          <a:effectLst/>
-        </p:spPr>
-        <p:txBody>
-          <a:bodyPr rtlCol="0" anchor="ctr" wrap="square"/>
-          <a:lstStyle/>
-          <a:p>
-            <a:pPr algn="ctr"/>
-          </a:p>
-        </p:txBody>
-      </p:sp>
-      <p:sp>
-        <p:nvSpPr>
-          <p:cNvPr id="22" name="Rectangle 21"/>
-          <p:cNvSpPr/>
-          <p:nvPr/>
-        </p:nvSpPr>
-        <p:spPr>
-          <a:xfrm>
-            <a:off x="10972800" y="3924300"/>
-            <a:ext cx="2895600" cy="914400"/>
-          </a:xfrm>
-          <a:prstGeom prst="rect">
+            <a:off x="10077450" y="6037898"/>
+            <a:ext cx="97155" cy="97155"/>
+          </a:xfrm>
+          <a:prstGeom prst="ellipse">
             <a:avLst/>
           </a:prstGeom>
           <a:solidFill>
@@ -11924,74 +11936,33 @@
       </p:sp>
       <p:sp>
         <p:nvSpPr>
-          <p:cNvPr id="23" name="TextBox 22"/>
-          <p:cNvSpPr txBox="1"/>
-          <p:nvPr/>
-        </p:nvSpPr>
-        <p:spPr>
-          <a:xfrm>
-            <a:off x="10972800" y="4171950"/>
-            <a:ext cx="2895600" cy="419100"/>
-          </a:xfrm>
-          <a:prstGeom prst="rect">
-            <a:avLst/>
-          </a:prstGeom>
-          <a:noFill/>
-        </p:spPr>
-        <p:txBody>
-          <a:bodyPr wrap="square" lIns="0" rIns="0" tIns="0" bIns="0" anchor="t">
-            <a:spAutoFit/>
-          </a:bodyPr>
-          <a:lstStyle/>
-          <a:p>
-            <a:pPr algn="ctr">
-              <a:lnSpc>
-                <a:spcPct val="100000"/>
-              </a:lnSpc>
-            </a:pPr>
-            <a:r>
-              <a:rPr sz="2475" b="1">
-                <a:solidFill>
-                  <a:srgbClr val="FFFFFF"/>
-                </a:solidFill>
-                <a:latin typeface="Pretendard"/>
-                <a:ea typeface="Pretendard"/>
-                <a:cs typeface="Pretendard"/>
-              </a:rPr>
-              <a:t>4. 처방</a:t>
-            </a:r>
-          </a:p>
-        </p:txBody>
-      </p:sp>
-      <p:sp>
-        <p:nvSpPr>
-          <p:cNvPr id="24" name="TextBox 23"/>
-          <p:cNvSpPr txBox="1"/>
-          <p:nvPr/>
-        </p:nvSpPr>
-        <p:spPr>
-          <a:xfrm>
-            <a:off x="11182350" y="5143500"/>
-            <a:ext cx="2476500" cy="1524000"/>
-          </a:xfrm>
-          <a:prstGeom prst="rect">
-            <a:avLst/>
-          </a:prstGeom>
-          <a:noFill/>
-        </p:spPr>
-        <p:txBody>
-          <a:bodyPr wrap="square" lIns="0" rIns="0" tIns="0" bIns="0" anchor="t">
-            <a:spAutoFit/>
-          </a:bodyPr>
-          <a:lstStyle/>
-          <a:p>
-            <a:pPr algn="ctr">
-              <a:lnSpc>
-                <a:spcPct val="146000"/>
-              </a:lnSpc>
-            </a:pPr>
-            <a:r>
-              <a:rPr sz="2100" b="0">
+          <p:cNvPr id="25" name="TextBox 24"/>
+          <p:cNvSpPr txBox="1"/>
+          <p:nvPr/>
+        </p:nvSpPr>
+        <p:spPr>
+          <a:xfrm>
+            <a:off x="10263188" y="5859780"/>
+            <a:ext cx="6634162" cy="453390"/>
+          </a:xfrm>
+          <a:prstGeom prst="rect">
+            <a:avLst/>
+          </a:prstGeom>
+          <a:noFill/>
+        </p:spPr>
+        <p:txBody>
+          <a:bodyPr wrap="square" lIns="0" rIns="0" tIns="0" bIns="0" anchor="ctr">
+            <a:spAutoFit/>
+          </a:bodyPr>
+          <a:lstStyle/>
+          <a:p>
+            <a:pPr algn="l">
+              <a:lnSpc>
+                <a:spcPct val="120000"/>
+              </a:lnSpc>
+            </a:pPr>
+            <a:r>
+              <a:rPr sz="1575" b="0">
                 <a:solidFill>
                   <a:srgbClr val="3D3D3D"/>
                 </a:solidFill>
@@ -11999,75 +11970,23 @@
                 <a:ea typeface="Pretendard"/>
                 <a:cs typeface="Pretendard"/>
               </a:rPr>
-              <a:t>on="product_id"</a:t>
-            </a:r>
-          </a:p>
-          <a:p>
-            <a:pPr algn="ctr">
-              <a:lnSpc>
-                <a:spcPct val="146000"/>
-              </a:lnSpc>
-            </a:pPr>
-            <a:r>
-              <a:rPr sz="2100" b="0">
-                <a:solidFill>
-                  <a:srgbClr val="3D3D3D"/>
-                </a:solidFill>
-                <a:latin typeface="Pretendard"/>
-                <a:ea typeface="Pretendard"/>
-                <a:cs typeface="Pretendard"/>
-              </a:rPr>
-              <a:t>문자열로</a:t>
-            </a:r>
-          </a:p>
-        </p:txBody>
-      </p:sp>
-      <p:sp>
-        <p:nvSpPr>
-          <p:cNvPr id="25" name="Rounded Rectangle 24"/>
+              <a:t>처방: with_amount 에서 filter</a:t>
+            </a:r>
+          </a:p>
+        </p:txBody>
+      </p:sp>
+      <p:sp>
+        <p:nvSpPr>
+          <p:cNvPr id="26" name="Oval 25"/>
           <p:cNvSpPr/>
           <p:nvPr/>
         </p:nvSpPr>
         <p:spPr>
           <a:xfrm>
-            <a:off x="14249400" y="3924300"/>
-            <a:ext cx="2895600" cy="3143250"/>
-          </a:xfrm>
-          <a:prstGeom prst="roundRect">
-            <a:avLst>
-              <a:gd name="adj" fmla="val 1644"/>
-            </a:avLst>
-          </a:prstGeom>
-          <a:solidFill>
-            <a:srgbClr val="FAFBFD"/>
-          </a:solidFill>
-          <a:ln w="9525">
-            <a:solidFill>
-              <a:srgbClr val="DCE1E8"/>
-            </a:solidFill>
-          </a:ln>
-          <a:effectLst/>
-        </p:spPr>
-        <p:txBody>
-          <a:bodyPr rtlCol="0" anchor="ctr" wrap="square"/>
-          <a:lstStyle/>
-          <a:p>
-            <a:pPr algn="ctr"/>
-          </a:p>
-        </p:txBody>
-      </p:sp>
-      <p:sp>
-        <p:nvSpPr>
-          <p:cNvPr id="26" name="Rectangle 25"/>
-          <p:cNvSpPr/>
-          <p:nvPr/>
-        </p:nvSpPr>
-        <p:spPr>
-          <a:xfrm>
-            <a:off x="14249400" y="3924300"/>
-            <a:ext cx="2895600" cy="914400"/>
-          </a:xfrm>
-          <a:prstGeom prst="rect">
+            <a:off x="8686800" y="3771900"/>
+            <a:ext cx="914400" cy="914400"/>
+          </a:xfrm>
+          <a:prstGeom prst="ellipse">
             <a:avLst/>
           </a:prstGeom>
           <a:solidFill>
@@ -12094,8 +12013,8 @@
         </p:nvSpPr>
         <p:spPr>
           <a:xfrm>
-            <a:off x="14249400" y="4171950"/>
-            <a:ext cx="2895600" cy="419100"/>
+            <a:off x="8686800" y="4057650"/>
+            <a:ext cx="914400" cy="381000"/>
           </a:xfrm>
           <a:prstGeom prst="rect">
             <a:avLst/>
@@ -12114,7 +12033,7 @@
               </a:lnSpc>
             </a:pPr>
             <a:r>
-              <a:rPr sz="2475" b="1">
+              <a:rPr sz="2250" b="1">
                 <a:solidFill>
                   <a:srgbClr val="FFFFFF"/>
                 </a:solidFill>
@@ -12122,73 +12041,14 @@
                 <a:ea typeface="Pretendard"/>
                 <a:cs typeface="Pretendard"/>
               </a:rPr>
-              <a:t>5. 한 번 더</a:t>
-            </a:r>
-          </a:p>
-        </p:txBody>
-      </p:sp>
-      <p:sp>
-        <p:nvSpPr>
-          <p:cNvPr id="28" name="TextBox 27"/>
-          <p:cNvSpPr txBox="1"/>
-          <p:nvPr/>
-        </p:nvSpPr>
-        <p:spPr>
-          <a:xfrm>
-            <a:off x="14458950" y="5143500"/>
-            <a:ext cx="2476500" cy="1524000"/>
-          </a:xfrm>
-          <a:prstGeom prst="rect">
-            <a:avLst/>
-          </a:prstGeom>
-          <a:noFill/>
-        </p:spPr>
-        <p:txBody>
-          <a:bodyPr wrap="square" lIns="0" rIns="0" tIns="0" bIns="0" anchor="t">
-            <a:spAutoFit/>
-          </a:bodyPr>
-          <a:lstStyle/>
-          <a:p>
-            <a:pPr algn="ctr">
-              <a:lnSpc>
-                <a:spcPct val="146000"/>
-              </a:lnSpc>
-            </a:pPr>
-            <a:r>
-              <a:rPr sz="2100" b="0">
-                <a:solidFill>
-                  <a:srgbClr val="3D3D3D"/>
-                </a:solidFill>
-                <a:latin typeface="Pretendard"/>
-                <a:ea typeface="Pretendard"/>
-                <a:cs typeface="Pretendard"/>
-              </a:rPr>
-              <a:t>joined 에 amount</a:t>
-            </a:r>
-          </a:p>
-          <a:p>
-            <a:pPr algn="ctr">
-              <a:lnSpc>
-                <a:spcPct val="146000"/>
-              </a:lnSpc>
-            </a:pPr>
-            <a:r>
-              <a:rPr sz="2100" b="0">
-                <a:solidFill>
-                  <a:srgbClr val="3D3D3D"/>
-                </a:solidFill>
-                <a:latin typeface="Pretendard"/>
-                <a:ea typeface="Pretendard"/>
-                <a:cs typeface="Pretendard"/>
-              </a:rPr>
-              <a:t>→ cannot resolve</a:t>
-            </a:r>
-          </a:p>
-        </p:txBody>
-      </p:sp>
-      <p:sp>
-        <p:nvSpPr>
-          <p:cNvPr id="29" name="Rectangle 28"/>
+              <a:t>VS</a:t>
+            </a:r>
+          </a:p>
+        </p:txBody>
+      </p:sp>
+      <p:sp>
+        <p:nvSpPr>
+          <p:cNvPr id="28" name="Rectangle 27"/>
           <p:cNvSpPr/>
           <p:nvPr/>
         </p:nvSpPr>
@@ -12218,7 +12078,7 @@
       </p:sp>
       <p:sp>
         <p:nvSpPr>
-          <p:cNvPr id="30" name="TextBox 29"/>
+          <p:cNvPr id="29" name="TextBox 28"/>
           <p:cNvSpPr txBox="1"/>
           <p:nvPr/>
         </p:nvSpPr>
@@ -12259,7 +12119,7 @@
       </p:sp>
       <p:sp>
         <p:nvSpPr>
-          <p:cNvPr id="31" name="TextBox 30"/>
+          <p:cNvPr id="30" name="TextBox 29"/>
           <p:cNvSpPr txBox="1"/>
           <p:nvPr/>
         </p:nvSpPr>
@@ -12318,7 +12178,7 @@
       <p:grpSpPr/>
       <p:sp>
         <p:nvSpPr>
-          <p:cNvPr id="2" name="Oval 1"/>
+          <p:cNvPr id="2" name="deckgen:decor"/>
           <p:cNvSpPr/>
           <p:nvPr/>
         </p:nvSpPr>
@@ -12348,7 +12208,7 @@
       </p:sp>
       <p:sp>
         <p:nvSpPr>
-          <p:cNvPr id="3" name="Oval 2"/>
+          <p:cNvPr id="3" name="deckgen:decor"/>
           <p:cNvSpPr/>
           <p:nvPr/>
         </p:nvSpPr>
@@ -12378,7 +12238,7 @@
       </p:sp>
       <p:sp>
         <p:nvSpPr>
-          <p:cNvPr id="4" name="Oval 3"/>
+          <p:cNvPr id="4" name="deckgen:decor"/>
           <p:cNvSpPr/>
           <p:nvPr/>
         </p:nvSpPr>
@@ -12442,7 +12302,7 @@
                 <a:ea typeface="Pretendard"/>
                 <a:cs typeface="Pretendard"/>
               </a:rPr>
-              <a:t>일부러 실패시키기</a:t>
+              <a:t>5~7단계</a:t>
             </a:r>
           </a:p>
         </p:txBody>
@@ -12483,7 +12343,7 @@
                 <a:ea typeface="Pretendard"/>
                 <a:cs typeface="Pretendard"/>
               </a:rPr>
-              <a:t>두 오류 — ambiguous 와 cannot resolve</a:t>
+              <a:t>필터 · 집계 · 윈도 — 결과 값으로 확인</a:t>
             </a:r>
           </a:p>
         </p:txBody>
@@ -12520,100 +12380,18 @@
       </p:sp>
       <p:sp>
         <p:nvSpPr>
-          <p:cNvPr id="8" name="TextBox 7"/>
-          <p:cNvSpPr txBox="1"/>
-          <p:nvPr/>
-        </p:nvSpPr>
-        <p:spPr>
-          <a:xfrm>
-            <a:off x="1143000" y="2857500"/>
-            <a:ext cx="7372350" cy="533400"/>
-          </a:xfrm>
-          <a:prstGeom prst="rect">
-            <a:avLst/>
-          </a:prstGeom>
-          <a:noFill/>
-        </p:spPr>
-        <p:txBody>
-          <a:bodyPr wrap="square" lIns="0" rIns="0" tIns="0" bIns="0" anchor="t">
-            <a:spAutoFit/>
-          </a:bodyPr>
-          <a:lstStyle/>
-          <a:p>
-            <a:pPr algn="l">
-              <a:lnSpc>
-                <a:spcPct val="110000"/>
-              </a:lnSpc>
-            </a:pPr>
-            <a:r>
-              <a:rPr sz="3150" b="1">
-                <a:solidFill>
-                  <a:srgbClr val="0D2B5E"/>
-                </a:solidFill>
-                <a:latin typeface="Pretendard"/>
-                <a:ea typeface="Pretendard"/>
-                <a:cs typeface="Pretendard"/>
-              </a:rPr>
-              <a:t>Reference 'product_id' is ambiguous</a:t>
-            </a:r>
-          </a:p>
-        </p:txBody>
-      </p:sp>
-      <p:sp>
-        <p:nvSpPr>
-          <p:cNvPr id="9" name="TextBox 8"/>
-          <p:cNvSpPr txBox="1"/>
-          <p:nvPr/>
-        </p:nvSpPr>
-        <p:spPr>
-          <a:xfrm>
-            <a:off x="1143000" y="3467100"/>
-            <a:ext cx="7372350" cy="876300"/>
-          </a:xfrm>
-          <a:prstGeom prst="rect">
-            <a:avLst/>
-          </a:prstGeom>
-          <a:noFill/>
-        </p:spPr>
-        <p:txBody>
-          <a:bodyPr wrap="square" lIns="0" rIns="0" tIns="0" bIns="0" anchor="t">
-            <a:spAutoFit/>
-          </a:bodyPr>
-          <a:lstStyle/>
-          <a:p>
-            <a:pPr algn="l">
-              <a:lnSpc>
-                <a:spcPct val="146000"/>
-              </a:lnSpc>
-            </a:pPr>
-            <a:r>
-              <a:rPr sz="2250" b="0">
-                <a:solidFill>
-                  <a:srgbClr val="3D3D3D"/>
-                </a:solidFill>
-                <a:latin typeface="Pretendard"/>
-                <a:ea typeface="Pretendard"/>
-                <a:cs typeface="Pretendard"/>
-              </a:rPr>
-              <a:t>양쪽에 같은 이름의 컬럼이 남아 있다</a:t>
-            </a:r>
-          </a:p>
-        </p:txBody>
-      </p:sp>
-      <p:sp>
-        <p:nvSpPr>
-          <p:cNvPr id="10" name="Rounded Rectangle 9"/>
+          <p:cNvPr id="8" name="Rounded Rectangle 7"/>
           <p:cNvSpPr/>
           <p:nvPr/>
         </p:nvSpPr>
         <p:spPr>
           <a:xfrm>
-            <a:off x="1143000" y="4610100"/>
-            <a:ext cx="7372350" cy="2857500"/>
+            <a:off x="1143000" y="2933700"/>
+            <a:ext cx="11430000" cy="1095375"/>
           </a:xfrm>
           <a:prstGeom prst="roundRect">
             <a:avLst>
-              <a:gd name="adj" fmla="val 1666"/>
+              <a:gd name="adj" fmla="val 4347"/>
             </a:avLst>
           </a:prstGeom>
           <a:solidFill>
@@ -12636,20 +12414,20 @@
       </p:sp>
       <p:sp>
         <p:nvSpPr>
-          <p:cNvPr id="11" name="Oval 10"/>
+          <p:cNvPr id="9" name="Oval 8"/>
           <p:cNvSpPr/>
           <p:nvPr/>
         </p:nvSpPr>
         <p:spPr>
           <a:xfrm>
-            <a:off x="1447800" y="5016817"/>
-            <a:ext cx="97155" cy="97155"/>
+            <a:off x="1447800" y="3181350"/>
+            <a:ext cx="590550" cy="590550"/>
           </a:xfrm>
           <a:prstGeom prst="ellipse">
             <a:avLst/>
           </a:prstGeom>
           <a:solidFill>
-            <a:srgbClr val="1E5BC6"/>
+            <a:srgbClr val="0D2B5E"/>
           </a:solidFill>
           <a:ln>
             <a:noFill/>
@@ -12666,22 +12444,104 @@
       </p:sp>
       <p:sp>
         <p:nvSpPr>
+          <p:cNvPr id="10" name="TextBox 9"/>
+          <p:cNvSpPr txBox="1"/>
+          <p:nvPr/>
+        </p:nvSpPr>
+        <p:spPr>
+          <a:xfrm>
+            <a:off x="1447800" y="3333750"/>
+            <a:ext cx="590550" cy="323850"/>
+          </a:xfrm>
+          <a:prstGeom prst="rect">
+            <a:avLst/>
+          </a:prstGeom>
+          <a:noFill/>
+        </p:spPr>
+        <p:txBody>
+          <a:bodyPr wrap="square" lIns="0" rIns="0" tIns="0" bIns="0" anchor="t">
+            <a:spAutoFit/>
+          </a:bodyPr>
+          <a:lstStyle/>
+          <a:p>
+            <a:pPr algn="ctr">
+              <a:lnSpc>
+                <a:spcPct val="100000"/>
+              </a:lnSpc>
+            </a:pPr>
+            <a:r>
+              <a:rPr sz="2250" b="1">
+                <a:solidFill>
+                  <a:srgbClr val="FFFFFF"/>
+                </a:solidFill>
+                <a:latin typeface="Pretendard"/>
+                <a:ea typeface="Pretendard"/>
+                <a:cs typeface="Pretendard"/>
+              </a:rPr>
+              <a:t>1</a:t>
+            </a:r>
+          </a:p>
+        </p:txBody>
+      </p:sp>
+      <p:sp>
+        <p:nvSpPr>
+          <p:cNvPr id="11" name="TextBox 10"/>
+          <p:cNvSpPr txBox="1"/>
+          <p:nvPr/>
+        </p:nvSpPr>
+        <p:spPr>
+          <a:xfrm>
+            <a:off x="2324100" y="3143250"/>
+            <a:ext cx="9906000" cy="400050"/>
+          </a:xfrm>
+          <a:prstGeom prst="rect">
+            <a:avLst/>
+          </a:prstGeom>
+          <a:noFill/>
+        </p:spPr>
+        <p:txBody>
+          <a:bodyPr wrap="square" lIns="0" rIns="0" tIns="0" bIns="0" anchor="t">
+            <a:spAutoFit/>
+          </a:bodyPr>
+          <a:lstStyle/>
+          <a:p>
+            <a:pPr algn="l">
+              <a:lnSpc>
+                <a:spcPct val="110000"/>
+              </a:lnSpc>
+            </a:pPr>
+            <a:r>
+              <a:rPr sz="2475" b="1">
+                <a:solidFill>
+                  <a:srgbClr val="0D2B5E"/>
+                </a:solidFill>
+                <a:latin typeface="Pretendard"/>
+                <a:ea typeface="Pretendard"/>
+                <a:cs typeface="Pretendard"/>
+              </a:rPr>
+              <a:t>filter(F.col("amount") &gt;= 100000)</a:t>
+            </a:r>
+          </a:p>
+        </p:txBody>
+      </p:sp>
+      <p:sp>
+        <p:nvSpPr>
           <p:cNvPr id="12" name="TextBox 11"/>
           <p:cNvSpPr txBox="1"/>
           <p:nvPr/>
         </p:nvSpPr>
         <p:spPr>
           <a:xfrm>
-            <a:off x="1633538" y="4838700"/>
-            <a:ext cx="6634162" cy="453390"/>
-          </a:xfrm>
-          <a:prstGeom prst="rect">
-            <a:avLst/>
-          </a:prstGeom>
-          <a:noFill/>
-        </p:spPr>
-        <p:txBody>
-          <a:bodyPr wrap="square" lIns="0" rIns="0" tIns="0" bIns="0" anchor="ctr">
+            <a:off x="2324100" y="3543300"/>
+            <a:ext cx="9906000" cy="361950"/>
+          </a:xfrm>
+          <a:prstGeom prst="rect">
+            <a:avLst/>
+          </a:prstGeom>
+          <a:noFill/>
+        </p:spPr>
+        <p:txBody>
+          <a:bodyPr wrap="square" lIns="0" rIns="0" tIns="0" bIns="0" anchor="t">
             <a:spAutoFit/>
           </a:bodyPr>
           <a:lstStyle/>
@@ -12692,7 +12552,7 @@
               </a:lnSpc>
             </a:pPr>
             <a:r>
-              <a:rPr sz="1575" b="0">
+              <a:rPr sz="2025" b="0">
                 <a:solidFill>
                   <a:srgbClr val="3D3D3D"/>
                 </a:solidFill>
@@ -12700,249 +12560,25 @@
                 <a:ea typeface="Pretendard"/>
                 <a:cs typeface="Pretendard"/>
               </a:rPr>
-              <a:t>원인: 조건식 조인은 두 컬럼을 다 남긴다</a:t>
-            </a:r>
-          </a:p>
-        </p:txBody>
-      </p:sp>
-      <p:sp>
-        <p:nvSpPr>
-          <p:cNvPr id="13" name="Oval 12"/>
+              <a:t>big 은 정확히 2행 — 3 keyboard 225000 · 4 monitor 930000 · recent_big 도 같음</a:t>
+            </a:r>
+          </a:p>
+        </p:txBody>
+      </p:sp>
+      <p:sp>
+        <p:nvSpPr>
+          <p:cNvPr id="13" name="Rounded Rectangle 12"/>
           <p:cNvSpPr/>
           <p:nvPr/>
         </p:nvSpPr>
         <p:spPr>
           <a:xfrm>
-            <a:off x="1447800" y="5527358"/>
-            <a:ext cx="97155" cy="97155"/>
-          </a:xfrm>
-          <a:prstGeom prst="ellipse">
-            <a:avLst/>
-          </a:prstGeom>
-          <a:solidFill>
-            <a:srgbClr val="1E5BC6"/>
-          </a:solidFill>
-          <a:ln>
-            <a:noFill/>
-          </a:ln>
-          <a:effectLst/>
-        </p:spPr>
-        <p:txBody>
-          <a:bodyPr rtlCol="0" anchor="ctr" wrap="square"/>
-          <a:lstStyle/>
-          <a:p>
-            <a:pPr algn="ctr"/>
-          </a:p>
-        </p:txBody>
-      </p:sp>
-      <p:sp>
-        <p:nvSpPr>
-          <p:cNvPr id="14" name="TextBox 13"/>
-          <p:cNvSpPr txBox="1"/>
-          <p:nvPr/>
-        </p:nvSpPr>
-        <p:spPr>
-          <a:xfrm>
-            <a:off x="1633538" y="5349240"/>
-            <a:ext cx="6634162" cy="453390"/>
-          </a:xfrm>
-          <a:prstGeom prst="rect">
-            <a:avLst/>
-          </a:prstGeom>
-          <a:noFill/>
-        </p:spPr>
-        <p:txBody>
-          <a:bodyPr wrap="square" lIns="0" rIns="0" tIns="0" bIns="0" anchor="ctr">
-            <a:spAutoFit/>
-          </a:bodyPr>
-          <a:lstStyle/>
-          <a:p>
-            <a:pPr algn="l">
-              <a:lnSpc>
-                <a:spcPct val="120000"/>
-              </a:lnSpc>
-            </a:pPr>
-            <a:r>
-              <a:rPr sz="1575" b="0">
-                <a:solidFill>
-                  <a:srgbClr val="3D3D3D"/>
-                </a:solidFill>
-                <a:latin typeface="Pretendard"/>
-                <a:ea typeface="Pretendard"/>
-                <a:cs typeface="Pretendard"/>
-              </a:rPr>
-              <a:t>처방 1: on="product_id" 문자열로</a:t>
-            </a:r>
-          </a:p>
-        </p:txBody>
-      </p:sp>
-      <p:sp>
-        <p:nvSpPr>
-          <p:cNvPr id="15" name="Oval 14"/>
-          <p:cNvSpPr/>
-          <p:nvPr/>
-        </p:nvSpPr>
-        <p:spPr>
-          <a:xfrm>
-            <a:off x="1447800" y="6037898"/>
-            <a:ext cx="97155" cy="97155"/>
-          </a:xfrm>
-          <a:prstGeom prst="ellipse">
-            <a:avLst/>
-          </a:prstGeom>
-          <a:solidFill>
-            <a:srgbClr val="1E5BC6"/>
-          </a:solidFill>
-          <a:ln>
-            <a:noFill/>
-          </a:ln>
-          <a:effectLst/>
-        </p:spPr>
-        <p:txBody>
-          <a:bodyPr rtlCol="0" anchor="ctr" wrap="square"/>
-          <a:lstStyle/>
-          <a:p>
-            <a:pPr algn="ctr"/>
-          </a:p>
-        </p:txBody>
-      </p:sp>
-      <p:sp>
-        <p:nvSpPr>
-          <p:cNvPr id="16" name="TextBox 15"/>
-          <p:cNvSpPr txBox="1"/>
-          <p:nvPr/>
-        </p:nvSpPr>
-        <p:spPr>
-          <a:xfrm>
-            <a:off x="1633538" y="5859780"/>
-            <a:ext cx="6634162" cy="453390"/>
-          </a:xfrm>
-          <a:prstGeom prst="rect">
-            <a:avLst/>
-          </a:prstGeom>
-          <a:noFill/>
-        </p:spPr>
-        <p:txBody>
-          <a:bodyPr wrap="square" lIns="0" rIns="0" tIns="0" bIns="0" anchor="ctr">
-            <a:spAutoFit/>
-          </a:bodyPr>
-          <a:lstStyle/>
-          <a:p>
-            <a:pPr algn="l">
-              <a:lnSpc>
-                <a:spcPct val="120000"/>
-              </a:lnSpc>
-            </a:pPr>
-            <a:r>
-              <a:rPr sz="1575" b="0">
-                <a:solidFill>
-                  <a:srgbClr val="3D3D3D"/>
-                </a:solidFill>
-                <a:latin typeface="Pretendard"/>
-                <a:ea typeface="Pretendard"/>
-                <a:cs typeface="Pretendard"/>
-              </a:rPr>
-              <a:t>처방 2: alias("o")·alias("p") 로 출처 명시</a:t>
-            </a:r>
-          </a:p>
-        </p:txBody>
-      </p:sp>
-      <p:sp>
-        <p:nvSpPr>
-          <p:cNvPr id="17" name="TextBox 16"/>
-          <p:cNvSpPr txBox="1"/>
-          <p:nvPr/>
-        </p:nvSpPr>
-        <p:spPr>
-          <a:xfrm>
-            <a:off x="9772650" y="2857500"/>
-            <a:ext cx="7372350" cy="533400"/>
-          </a:xfrm>
-          <a:prstGeom prst="rect">
-            <a:avLst/>
-          </a:prstGeom>
-          <a:noFill/>
-        </p:spPr>
-        <p:txBody>
-          <a:bodyPr wrap="square" lIns="0" rIns="0" tIns="0" bIns="0" anchor="t">
-            <a:spAutoFit/>
-          </a:bodyPr>
-          <a:lstStyle/>
-          <a:p>
-            <a:pPr algn="l">
-              <a:lnSpc>
-                <a:spcPct val="110000"/>
-              </a:lnSpc>
-            </a:pPr>
-            <a:r>
-              <a:rPr sz="3150" b="1">
-                <a:solidFill>
-                  <a:srgbClr val="0D2B5E"/>
-                </a:solidFill>
-                <a:latin typeface="Pretendard"/>
-                <a:ea typeface="Pretendard"/>
-                <a:cs typeface="Pretendard"/>
-              </a:rPr>
-              <a:t>cannot resolve 'amount'</a:t>
-            </a:r>
-          </a:p>
-        </p:txBody>
-      </p:sp>
-      <p:sp>
-        <p:nvSpPr>
-          <p:cNvPr id="18" name="TextBox 17"/>
-          <p:cNvSpPr txBox="1"/>
-          <p:nvPr/>
-        </p:nvSpPr>
-        <p:spPr>
-          <a:xfrm>
-            <a:off x="9772650" y="3467100"/>
-            <a:ext cx="7372350" cy="876300"/>
-          </a:xfrm>
-          <a:prstGeom prst="rect">
-            <a:avLst/>
-          </a:prstGeom>
-          <a:noFill/>
-        </p:spPr>
-        <p:txBody>
-          <a:bodyPr wrap="square" lIns="0" rIns="0" tIns="0" bIns="0" anchor="t">
-            <a:spAutoFit/>
-          </a:bodyPr>
-          <a:lstStyle/>
-          <a:p>
-            <a:pPr algn="l">
-              <a:lnSpc>
-                <a:spcPct val="146000"/>
-              </a:lnSpc>
-            </a:pPr>
-            <a:r>
-              <a:rPr sz="2250" b="0">
-                <a:solidFill>
-                  <a:srgbClr val="3D3D3D"/>
-                </a:solidFill>
-                <a:latin typeface="Pretendard"/>
-                <a:ea typeface="Pretendard"/>
-                <a:cs typeface="Pretendard"/>
-              </a:rPr>
-              <a:t>그 시점의 DataFrame 에는 없는 컬럼</a:t>
-            </a:r>
-          </a:p>
-        </p:txBody>
-      </p:sp>
-      <p:sp>
-        <p:nvSpPr>
-          <p:cNvPr id="19" name="Rounded Rectangle 18"/>
-          <p:cNvSpPr/>
-          <p:nvPr/>
-        </p:nvSpPr>
-        <p:spPr>
-          <a:xfrm>
-            <a:off x="9772650" y="4610100"/>
-            <a:ext cx="7372350" cy="2857500"/>
+            <a:off x="1143000" y="4200525"/>
+            <a:ext cx="11430000" cy="1095375"/>
           </a:xfrm>
           <a:prstGeom prst="roundRect">
             <a:avLst>
-              <a:gd name="adj" fmla="val 1666"/>
+              <a:gd name="adj" fmla="val 4347"/>
             </a:avLst>
           </a:prstGeom>
           <a:solidFill>
@@ -12965,20 +12601,20 @@
       </p:sp>
       <p:sp>
         <p:nvSpPr>
-          <p:cNvPr id="20" name="Oval 19"/>
+          <p:cNvPr id="14" name="Oval 13"/>
           <p:cNvSpPr/>
           <p:nvPr/>
         </p:nvSpPr>
         <p:spPr>
           <a:xfrm>
-            <a:off x="10077450" y="5016817"/>
-            <a:ext cx="97155" cy="97155"/>
+            <a:off x="1447800" y="4448175"/>
+            <a:ext cx="590550" cy="590550"/>
           </a:xfrm>
           <a:prstGeom prst="ellipse">
             <a:avLst/>
           </a:prstGeom>
           <a:solidFill>
-            <a:srgbClr val="1E5BC6"/>
+            <a:srgbClr val="0D2B5E"/>
           </a:solidFill>
           <a:ln>
             <a:noFill/>
@@ -12995,33 +12631,115 @@
       </p:sp>
       <p:sp>
         <p:nvSpPr>
-          <p:cNvPr id="21" name="TextBox 20"/>
-          <p:cNvSpPr txBox="1"/>
-          <p:nvPr/>
-        </p:nvSpPr>
-        <p:spPr>
-          <a:xfrm>
-            <a:off x="10263188" y="4838700"/>
-            <a:ext cx="6634162" cy="453390"/>
-          </a:xfrm>
-          <a:prstGeom prst="rect">
-            <a:avLst/>
-          </a:prstGeom>
-          <a:noFill/>
-        </p:spPr>
-        <p:txBody>
-          <a:bodyPr wrap="square" lIns="0" rIns="0" tIns="0" bIns="0" anchor="ctr">
+          <p:cNvPr id="15" name="TextBox 14"/>
+          <p:cNvSpPr txBox="1"/>
+          <p:nvPr/>
+        </p:nvSpPr>
+        <p:spPr>
+          <a:xfrm>
+            <a:off x="1447800" y="4600575"/>
+            <a:ext cx="590550" cy="323850"/>
+          </a:xfrm>
+          <a:prstGeom prst="rect">
+            <a:avLst/>
+          </a:prstGeom>
+          <a:noFill/>
+        </p:spPr>
+        <p:txBody>
+          <a:bodyPr wrap="square" lIns="0" rIns="0" tIns="0" bIns="0" anchor="t">
+            <a:spAutoFit/>
+          </a:bodyPr>
+          <a:lstStyle/>
+          <a:p>
+            <a:pPr algn="ctr">
+              <a:lnSpc>
+                <a:spcPct val="100000"/>
+              </a:lnSpc>
+            </a:pPr>
+            <a:r>
+              <a:rPr sz="2250" b="1">
+                <a:solidFill>
+                  <a:srgbClr val="FFFFFF"/>
+                </a:solidFill>
+                <a:latin typeface="Pretendard"/>
+                <a:ea typeface="Pretendard"/>
+                <a:cs typeface="Pretendard"/>
+              </a:rPr>
+              <a:t>2</a:t>
+            </a:r>
+          </a:p>
+        </p:txBody>
+      </p:sp>
+      <p:sp>
+        <p:nvSpPr>
+          <p:cNvPr id="16" name="TextBox 15"/>
+          <p:cNvSpPr txBox="1"/>
+          <p:nvPr/>
+        </p:nvSpPr>
+        <p:spPr>
+          <a:xfrm>
+            <a:off x="2324100" y="4410075"/>
+            <a:ext cx="9906000" cy="400050"/>
+          </a:xfrm>
+          <a:prstGeom prst="rect">
+            <a:avLst/>
+          </a:prstGeom>
+          <a:noFill/>
+        </p:spPr>
+        <p:txBody>
+          <a:bodyPr wrap="square" lIns="0" rIns="0" tIns="0" bIns="0" anchor="t">
             <a:spAutoFit/>
           </a:bodyPr>
           <a:lstStyle/>
           <a:p>
             <a:pPr algn="l">
               <a:lnSpc>
+                <a:spcPct val="110000"/>
+              </a:lnSpc>
+            </a:pPr>
+            <a:r>
+              <a:rPr sz="2475" b="1">
+                <a:solidFill>
+                  <a:srgbClr val="0D2B5E"/>
+                </a:solidFill>
+                <a:latin typeface="Pretendard"/>
+                <a:ea typeface="Pretendard"/>
+                <a:cs typeface="Pretendard"/>
+              </a:rPr>
+              <a:t>groupBy("name").agg(…).orderBy(F.desc(…))</a:t>
+            </a:r>
+          </a:p>
+        </p:txBody>
+      </p:sp>
+      <p:sp>
+        <p:nvSpPr>
+          <p:cNvPr id="17" name="TextBox 16"/>
+          <p:cNvSpPr txBox="1"/>
+          <p:nvPr/>
+        </p:nvSpPr>
+        <p:spPr>
+          <a:xfrm>
+            <a:off x="2324100" y="4810125"/>
+            <a:ext cx="9906000" cy="361950"/>
+          </a:xfrm>
+          <a:prstGeom prst="rect">
+            <a:avLst/>
+          </a:prstGeom>
+          <a:noFill/>
+        </p:spPr>
+        <p:txBody>
+          <a:bodyPr wrap="square" lIns="0" rIns="0" tIns="0" bIns="0" anchor="t">
+            <a:spAutoFit/>
+          </a:bodyPr>
+          <a:lstStyle/>
+          <a:p>
+            <a:pPr algn="l">
+              <a:lnSpc>
                 <a:spcPct val="120000"/>
               </a:lnSpc>
             </a:pPr>
             <a:r>
-              <a:rPr sz="1575" b="0">
+              <a:rPr sz="2025" b="0">
                 <a:solidFill>
                   <a:srgbClr val="3D3D3D"/>
                 </a:solidFill>
@@ -13029,27 +12747,61 @@
                 <a:ea typeface="Pretendard"/>
                 <a:cs typeface="Pretendard"/>
               </a:rPr>
-              <a:t>원인: 오타 또는 가공 전 변수(joined) 참조</a:t>
-            </a:r>
-          </a:p>
-        </p:txBody>
-      </p:sp>
-      <p:sp>
-        <p:nvSpPr>
-          <p:cNvPr id="22" name="Oval 21"/>
+              <a:t>monitor 930000·3 / keyboard 315000·7 / mouse 69000·3</a:t>
+            </a:r>
+          </a:p>
+        </p:txBody>
+      </p:sp>
+      <p:sp>
+        <p:nvSpPr>
+          <p:cNvPr id="18" name="Rounded Rectangle 17"/>
           <p:cNvSpPr/>
           <p:nvPr/>
         </p:nvSpPr>
         <p:spPr>
           <a:xfrm>
-            <a:off x="10077450" y="5527358"/>
-            <a:ext cx="97155" cy="97155"/>
+            <a:off x="1143000" y="5467350"/>
+            <a:ext cx="11430000" cy="1095375"/>
+          </a:xfrm>
+          <a:prstGeom prst="roundRect">
+            <a:avLst>
+              <a:gd name="adj" fmla="val 4347"/>
+            </a:avLst>
+          </a:prstGeom>
+          <a:solidFill>
+            <a:srgbClr val="FAFBFD"/>
+          </a:solidFill>
+          <a:ln w="9525">
+            <a:solidFill>
+              <a:srgbClr val="DCE1E8"/>
+            </a:solidFill>
+          </a:ln>
+          <a:effectLst/>
+        </p:spPr>
+        <p:txBody>
+          <a:bodyPr rtlCol="0" anchor="ctr" wrap="square"/>
+          <a:lstStyle/>
+          <a:p>
+            <a:pPr algn="ctr"/>
+          </a:p>
+        </p:txBody>
+      </p:sp>
+      <p:sp>
+        <p:nvSpPr>
+          <p:cNvPr id="19" name="Oval 18"/>
+          <p:cNvSpPr/>
+          <p:nvPr/>
+        </p:nvSpPr>
+        <p:spPr>
+          <a:xfrm>
+            <a:off x="1447800" y="5715000"/>
+            <a:ext cx="590550" cy="590550"/>
           </a:xfrm>
           <a:prstGeom prst="ellipse">
             <a:avLst/>
           </a:prstGeom>
           <a:solidFill>
-            <a:srgbClr val="1E5BC6"/>
+            <a:srgbClr val="0D2B5E"/>
           </a:solidFill>
           <a:ln>
             <a:noFill/>
@@ -13066,33 +12818,115 @@
       </p:sp>
       <p:sp>
         <p:nvSpPr>
-          <p:cNvPr id="23" name="TextBox 22"/>
-          <p:cNvSpPr txBox="1"/>
-          <p:nvPr/>
-        </p:nvSpPr>
-        <p:spPr>
-          <a:xfrm>
-            <a:off x="10263188" y="5349240"/>
-            <a:ext cx="6634162" cy="453390"/>
-          </a:xfrm>
-          <a:prstGeom prst="rect">
-            <a:avLst/>
-          </a:prstGeom>
-          <a:noFill/>
-        </p:spPr>
-        <p:txBody>
-          <a:bodyPr wrap="square" lIns="0" rIns="0" tIns="0" bIns="0" anchor="ctr">
+          <p:cNvPr id="20" name="TextBox 19"/>
+          <p:cNvSpPr txBox="1"/>
+          <p:nvPr/>
+        </p:nvSpPr>
+        <p:spPr>
+          <a:xfrm>
+            <a:off x="1447800" y="5867400"/>
+            <a:ext cx="590550" cy="323850"/>
+          </a:xfrm>
+          <a:prstGeom prst="rect">
+            <a:avLst/>
+          </a:prstGeom>
+          <a:noFill/>
+        </p:spPr>
+        <p:txBody>
+          <a:bodyPr wrap="square" lIns="0" rIns="0" tIns="0" bIns="0" anchor="t">
+            <a:spAutoFit/>
+          </a:bodyPr>
+          <a:lstStyle/>
+          <a:p>
+            <a:pPr algn="ctr">
+              <a:lnSpc>
+                <a:spcPct val="100000"/>
+              </a:lnSpc>
+            </a:pPr>
+            <a:r>
+              <a:rPr sz="2250" b="1">
+                <a:solidFill>
+                  <a:srgbClr val="FFFFFF"/>
+                </a:solidFill>
+                <a:latin typeface="Pretendard"/>
+                <a:ea typeface="Pretendard"/>
+                <a:cs typeface="Pretendard"/>
+              </a:rPr>
+              <a:t>3</a:t>
+            </a:r>
+          </a:p>
+        </p:txBody>
+      </p:sp>
+      <p:sp>
+        <p:nvSpPr>
+          <p:cNvPr id="21" name="TextBox 20"/>
+          <p:cNvSpPr txBox="1"/>
+          <p:nvPr/>
+        </p:nvSpPr>
+        <p:spPr>
+          <a:xfrm>
+            <a:off x="2324100" y="5676900"/>
+            <a:ext cx="9906000" cy="400050"/>
+          </a:xfrm>
+          <a:prstGeom prst="rect">
+            <a:avLst/>
+          </a:prstGeom>
+          <a:noFill/>
+        </p:spPr>
+        <p:txBody>
+          <a:bodyPr wrap="square" lIns="0" rIns="0" tIns="0" bIns="0" anchor="t">
             <a:spAutoFit/>
           </a:bodyPr>
           <a:lstStyle/>
           <a:p>
             <a:pPr algn="l">
               <a:lnSpc>
+                <a:spcPct val="110000"/>
+              </a:lnSpc>
+            </a:pPr>
+            <a:r>
+              <a:rPr sz="2475" b="1">
+                <a:solidFill>
+                  <a:srgbClr val="0D2B5E"/>
+                </a:solidFill>
+                <a:latin typeface="Pretendard"/>
+                <a:ea typeface="Pretendard"/>
+                <a:cs typeface="Pretendard"/>
+              </a:rPr>
+              <a:t>F.row_number().over(w) → filter("rn = 1")</a:t>
+            </a:r>
+          </a:p>
+        </p:txBody>
+      </p:sp>
+      <p:sp>
+        <p:nvSpPr>
+          <p:cNvPr id="22" name="TextBox 21"/>
+          <p:cNvSpPr txBox="1"/>
+          <p:nvPr/>
+        </p:nvSpPr>
+        <p:spPr>
+          <a:xfrm>
+            <a:off x="2324100" y="6076950"/>
+            <a:ext cx="9906000" cy="361950"/>
+          </a:xfrm>
+          <a:prstGeom prst="rect">
+            <a:avLst/>
+          </a:prstGeom>
+          <a:noFill/>
+        </p:spPr>
+        <p:txBody>
+          <a:bodyPr wrap="square" lIns="0" rIns="0" tIns="0" bIns="0" anchor="t">
+            <a:spAutoFit/>
+          </a:bodyPr>
+          <a:lstStyle/>
+          <a:p>
+            <a:pPr algn="l">
+              <a:lnSpc>
                 <a:spcPct val="120000"/>
               </a:lnSpc>
             </a:pPr>
             <a:r>
-              <a:rPr sz="1575" b="0">
+              <a:rPr sz="2025" b="0">
                 <a:solidFill>
                   <a:srgbClr val="3D3D3D"/>
                 </a:solidFill>
@@ -13100,27 +12934,161 @@
                 <a:ea typeface="Pretendard"/>
                 <a:cs typeface="Pretendard"/>
               </a:rPr>
-              <a:t>처방: 직전 DataFrame 에 printSchema()</a:t>
-            </a:r>
-          </a:p>
-        </p:txBody>
-      </p:sp>
-      <p:sp>
-        <p:nvSpPr>
-          <p:cNvPr id="24" name="Oval 23"/>
+              <a:t>08-24 keyboard 90000 · 08-25 monitor 930000 · 08-26 mouse 46000</a:t>
+            </a:r>
+          </a:p>
+        </p:txBody>
+      </p:sp>
+      <p:sp>
+        <p:nvSpPr>
+          <p:cNvPr id="23" name="Rounded Rectangle 22"/>
           <p:cNvSpPr/>
           <p:nvPr/>
         </p:nvSpPr>
         <p:spPr>
           <a:xfrm>
-            <a:off x="10077450" y="6037898"/>
-            <a:ext cx="97155" cy="97155"/>
-          </a:xfrm>
-          <a:prstGeom prst="ellipse">
-            <a:avLst/>
-          </a:prstGeom>
-          <a:solidFill>
-            <a:srgbClr val="1E5BC6"/>
+            <a:off x="13144500" y="2933700"/>
+            <a:ext cx="4000500" cy="3629025"/>
+          </a:xfrm>
+          <a:prstGeom prst="roundRect">
+            <a:avLst>
+              <a:gd name="adj" fmla="val 1312"/>
+            </a:avLst>
+          </a:prstGeom>
+          <a:solidFill>
+            <a:srgbClr val="EDF3FD"/>
+          </a:solidFill>
+          <a:ln w="9525">
+            <a:solidFill>
+              <a:srgbClr val="BFD3F5"/>
+            </a:solidFill>
+          </a:ln>
+          <a:effectLst/>
+        </p:spPr>
+        <p:txBody>
+          <a:bodyPr rtlCol="0" anchor="ctr" wrap="square"/>
+          <a:lstStyle/>
+          <a:p>
+            <a:pPr algn="ctr"/>
+          </a:p>
+        </p:txBody>
+      </p:sp>
+      <p:sp>
+        <p:nvSpPr>
+          <p:cNvPr id="24" name="TextBox 23"/>
+          <p:cNvSpPr txBox="1"/>
+          <p:nvPr/>
+        </p:nvSpPr>
+        <p:spPr>
+          <a:xfrm>
+            <a:off x="13487400" y="3929062"/>
+            <a:ext cx="3314700" cy="304800"/>
+          </a:xfrm>
+          <a:prstGeom prst="rect">
+            <a:avLst/>
+          </a:prstGeom>
+          <a:noFill/>
+        </p:spPr>
+        <p:txBody>
+          <a:bodyPr wrap="square" lIns="0" rIns="0" tIns="0" bIns="0" anchor="t">
+            <a:spAutoFit/>
+          </a:bodyPr>
+          <a:lstStyle/>
+          <a:p>
+            <a:pPr algn="l">
+              <a:lnSpc>
+                <a:spcPct val="100000"/>
+              </a:lnSpc>
+            </a:pPr>
+            <a:r>
+              <a:rPr sz="1800" b="1" spc="190">
+                <a:solidFill>
+                  <a:srgbClr val="1E5BC6"/>
+                </a:solidFill>
+                <a:latin typeface="Pretendard"/>
+                <a:ea typeface="Pretendard"/>
+                <a:cs typeface="Pretendard"/>
+              </a:rPr>
+              <a:t>복합 조건</a:t>
+            </a:r>
+          </a:p>
+        </p:txBody>
+      </p:sp>
+      <p:sp>
+        <p:nvSpPr>
+          <p:cNvPr id="25" name="TextBox 24"/>
+          <p:cNvSpPr txBox="1"/>
+          <p:nvPr/>
+        </p:nvSpPr>
+        <p:spPr>
+          <a:xfrm>
+            <a:off x="13487400" y="4329112"/>
+            <a:ext cx="3314700" cy="1238250"/>
+          </a:xfrm>
+          <a:prstGeom prst="rect">
+            <a:avLst/>
+          </a:prstGeom>
+          <a:noFill/>
+        </p:spPr>
+        <p:txBody>
+          <a:bodyPr wrap="square" lIns="0" rIns="0" tIns="0" bIns="0" anchor="t">
+            <a:spAutoFit/>
+          </a:bodyPr>
+          <a:lstStyle/>
+          <a:p>
+            <a:pPr algn="l">
+              <a:lnSpc>
+                <a:spcPct val="138000"/>
+              </a:lnSpc>
+            </a:pPr>
+            <a:r>
+              <a:rPr sz="2700" b="1">
+                <a:solidFill>
+                  <a:srgbClr val="0D2B5E"/>
+                </a:solidFill>
+                <a:latin typeface="Pretendard"/>
+                <a:ea typeface="Pretendard"/>
+                <a:cs typeface="Pretendard"/>
+              </a:rPr>
+              <a:t>(조건1) &amp;</a:t>
+            </a:r>
+          </a:p>
+          <a:p>
+            <a:pPr algn="l">
+              <a:lnSpc>
+                <a:spcPct val="138000"/>
+              </a:lnSpc>
+            </a:pPr>
+            <a:r>
+              <a:rPr sz="2700" b="1">
+                <a:solidFill>
+                  <a:srgbClr val="0D2B5E"/>
+                </a:solidFill>
+                <a:latin typeface="Pretendard"/>
+                <a:ea typeface="Pretendard"/>
+                <a:cs typeface="Pretendard"/>
+              </a:rPr>
+              <a:t>(조건2)</a:t>
+            </a:r>
+          </a:p>
+        </p:txBody>
+      </p:sp>
+      <p:sp>
+        <p:nvSpPr>
+          <p:cNvPr id="26" name="Rectangle 25"/>
+          <p:cNvSpPr/>
+          <p:nvPr/>
+        </p:nvSpPr>
+        <p:spPr>
+          <a:xfrm>
+            <a:off x="1143000" y="8058150"/>
+            <a:ext cx="16002000" cy="9525"/>
+          </a:xfrm>
+          <a:prstGeom prst="rect">
+            <a:avLst/>
+          </a:prstGeom>
+          <a:solidFill>
+            <a:srgbClr val="DCE1E8"/>
           </a:solidFill>
           <a:ln>
             <a:noFill/>
@@ -13137,149 +13105,7 @@
       </p:sp>
       <p:sp>
         <p:nvSpPr>
-          <p:cNvPr id="25" name="TextBox 24"/>
-          <p:cNvSpPr txBox="1"/>
-          <p:nvPr/>
-        </p:nvSpPr>
-        <p:spPr>
-          <a:xfrm>
-            <a:off x="10263188" y="5859780"/>
-            <a:ext cx="6634162" cy="453390"/>
-          </a:xfrm>
-          <a:prstGeom prst="rect">
-            <a:avLst/>
-          </a:prstGeom>
-          <a:noFill/>
-        </p:spPr>
-        <p:txBody>
-          <a:bodyPr wrap="square" lIns="0" rIns="0" tIns="0" bIns="0" anchor="ctr">
-            <a:spAutoFit/>
-          </a:bodyPr>
-          <a:lstStyle/>
-          <a:p>
-            <a:pPr algn="l">
-              <a:lnSpc>
-                <a:spcPct val="120000"/>
-              </a:lnSpc>
-            </a:pPr>
-            <a:r>
-              <a:rPr sz="1575" b="0">
-                <a:solidFill>
-                  <a:srgbClr val="3D3D3D"/>
-                </a:solidFill>
-                <a:latin typeface="Pretendard"/>
-                <a:ea typeface="Pretendard"/>
-                <a:cs typeface="Pretendard"/>
-              </a:rPr>
-              <a:t>with_amount 에서 다시 filter</a:t>
-            </a:r>
-          </a:p>
-        </p:txBody>
-      </p:sp>
-      <p:sp>
-        <p:nvSpPr>
-          <p:cNvPr id="26" name="Oval 25"/>
-          <p:cNvSpPr/>
-          <p:nvPr/>
-        </p:nvSpPr>
-        <p:spPr>
-          <a:xfrm>
-            <a:off x="8686800" y="3771900"/>
-            <a:ext cx="914400" cy="914400"/>
-          </a:xfrm>
-          <a:prstGeom prst="ellipse">
-            <a:avLst/>
-          </a:prstGeom>
-          <a:solidFill>
-            <a:srgbClr val="0D2B5E"/>
-          </a:solidFill>
-          <a:ln>
-            <a:noFill/>
-          </a:ln>
-          <a:effectLst/>
-        </p:spPr>
-        <p:txBody>
-          <a:bodyPr rtlCol="0" anchor="ctr" wrap="square"/>
-          <a:lstStyle/>
-          <a:p>
-            <a:pPr algn="ctr"/>
-          </a:p>
-        </p:txBody>
-      </p:sp>
-      <p:sp>
-        <p:nvSpPr>
           <p:cNvPr id="27" name="TextBox 26"/>
-          <p:cNvSpPr txBox="1"/>
-          <p:nvPr/>
-        </p:nvSpPr>
-        <p:spPr>
-          <a:xfrm>
-            <a:off x="8686800" y="4057650"/>
-            <a:ext cx="914400" cy="381000"/>
-          </a:xfrm>
-          <a:prstGeom prst="rect">
-            <a:avLst/>
-          </a:prstGeom>
-          <a:noFill/>
-        </p:spPr>
-        <p:txBody>
-          <a:bodyPr wrap="square" lIns="0" rIns="0" tIns="0" bIns="0" anchor="t">
-            <a:spAutoFit/>
-          </a:bodyPr>
-          <a:lstStyle/>
-          <a:p>
-            <a:pPr algn="ctr">
-              <a:lnSpc>
-                <a:spcPct val="100000"/>
-              </a:lnSpc>
-            </a:pPr>
-            <a:r>
-              <a:rPr sz="2250" b="1">
-                <a:solidFill>
-                  <a:srgbClr val="FFFFFF"/>
-                </a:solidFill>
-                <a:latin typeface="Pretendard"/>
-                <a:ea typeface="Pretendard"/>
-                <a:cs typeface="Pretendard"/>
-              </a:rPr>
-              <a:t>VS</a:t>
-            </a:r>
-          </a:p>
-        </p:txBody>
-      </p:sp>
-      <p:sp>
-        <p:nvSpPr>
-          <p:cNvPr id="28" name="Rectangle 27"/>
-          <p:cNvSpPr/>
-          <p:nvPr/>
-        </p:nvSpPr>
-        <p:spPr>
-          <a:xfrm>
-            <a:off x="1143000" y="8058150"/>
-            <a:ext cx="16002000" cy="9525"/>
-          </a:xfrm>
-          <a:prstGeom prst="rect">
-            <a:avLst/>
-          </a:prstGeom>
-          <a:solidFill>
-            <a:srgbClr val="DCE1E8"/>
-          </a:solidFill>
-          <a:ln>
-            <a:noFill/>
-          </a:ln>
-          <a:effectLst/>
-        </p:spPr>
-        <p:txBody>
-          <a:bodyPr rtlCol="0" anchor="ctr" wrap="square"/>
-          <a:lstStyle/>
-          <a:p>
-            <a:pPr algn="ctr"/>
-          </a:p>
-        </p:txBody>
-      </p:sp>
-      <p:sp>
-        <p:nvSpPr>
-          <p:cNvPr id="29" name="TextBox 28"/>
           <p:cNvSpPr txBox="1"/>
           <p:nvPr/>
         </p:nvSpPr>
@@ -13320,7 +13146,7 @@
       </p:sp>
       <p:sp>
         <p:nvSpPr>
-          <p:cNvPr id="30" name="TextBox 29"/>
+          <p:cNvPr id="28" name="TextBox 27"/>
           <p:cNvSpPr txBox="1"/>
           <p:nvPr/>
         </p:nvSpPr>
@@ -13379,7 +13205,7 @@
       <p:grpSpPr/>
       <p:sp>
         <p:nvSpPr>
-          <p:cNvPr id="2" name="Oval 1"/>
+          <p:cNvPr id="2" name="deckgen:decor"/>
           <p:cNvSpPr/>
           <p:nvPr/>
         </p:nvSpPr>
@@ -13409,7 +13235,7 @@
       </p:sp>
       <p:sp>
         <p:nvSpPr>
-          <p:cNvPr id="3" name="Oval 2"/>
+          <p:cNvPr id="3" name="deckgen:decor"/>
           <p:cNvSpPr/>
           <p:nvPr/>
         </p:nvSpPr>
@@ -13439,7 +13265,7 @@
       </p:sp>
       <p:sp>
         <p:nvSpPr>
-          <p:cNvPr id="4" name="Oval 3"/>
+          <p:cNvPr id="4" name="deckgen:decor"/>
           <p:cNvSpPr/>
           <p:nvPr/>
         </p:nvSpPr>
@@ -13503,7 +13329,7 @@
                 <a:ea typeface="Pretendard"/>
                 <a:cs typeface="Pretendard"/>
               </a:rPr>
-              <a:t>5~7단계</a:t>
+              <a:t>8단계</a:t>
             </a:r>
           </a:p>
         </p:txBody>
@@ -13544,7 +13370,7 @@
                 <a:ea typeface="Pretendard"/>
                 <a:cs typeface="Pretendard"/>
               </a:rPr>
-              <a:t>집계 결과 · 윈도 · 실행 계획</a:t>
+              <a:t>sales.explain() — SortMergeJoin 과 Exchange 넷</a:t>
             </a:r>
           </a:p>
         </p:txBody>
@@ -13720,7 +13546,7 @@
                 <a:ea typeface="Pretendard"/>
                 <a:cs typeface="Pretendard"/>
               </a:rPr>
-              <a:t>sales.show() 순서 확인</a:t>
+              <a:t>sales.explain() → SortMergeJoin</a:t>
             </a:r>
           </a:p>
         </p:txBody>
@@ -13761,7 +13587,7 @@
                 <a:ea typeface="Pretendard"/>
                 <a:cs typeface="Pretendard"/>
               </a:rPr>
-              <a:t>monitor 930,000 → keyboard 315,000 → mouse 69,000 이면 집계가 맞다</a:t>
+              <a:t>Exchange 넷 — 조인 양쪽 hashpartitioning(product_id) 둘 · name · range</a:t>
             </a:r>
           </a:p>
         </p:txBody>
@@ -13907,7 +13733,7 @@
                 <a:ea typeface="Pretendard"/>
                 <a:cs typeface="Pretendard"/>
               </a:rPr>
-              <a:t>Window.partitionBy("order_date")</a:t>
+              <a:t>왜 Broadcast 가 아닌가</a:t>
             </a:r>
           </a:p>
         </p:txBody>
@@ -13948,7 +13774,7 @@
                 <a:ea typeface="Pretendard"/>
                 <a:cs typeface="Pretendard"/>
               </a:rPr>
-              <a:t>F.row_number().over(w) 로 rn 을 만들고 filter("rn = 1") 이 날짜별 1위</a:t>
+              <a:t>createDataFrame 표는 크기를 몰라 약 6.9×10¹⁸ 바이트로 봄 → 10MB 초과</a:t>
             </a:r>
           </a:p>
         </p:txBody>
@@ -14094,7 +13920,7 @@
                 <a:ea typeface="Pretendard"/>
                 <a:cs typeface="Pretendard"/>
               </a:rPr>
-              <a:t>sales.explain()</a:t>
+              <a:t>orders.join(F.broadcast(products), …)</a:t>
             </a:r>
           </a:p>
         </p:txBody>
@@ -14135,7 +13961,7 @@
                 <a:ea typeface="Pretendard"/>
                 <a:cs typeface="Pretendard"/>
               </a:rPr>
-              <a:t>products 가 작아 BroadcastHashJoin · groupBy 때문에 Exchange 한 번</a:t>
+              <a:t>BroadcastHashJoin · BroadcastExchange — 조인 쪽 Exchange 가 사라짐</a:t>
             </a:r>
           </a:p>
         </p:txBody>
@@ -14210,7 +14036,7 @@
                 <a:ea typeface="Pretendard"/>
                 <a:cs typeface="Pretendard"/>
               </a:rPr>
-              <a:t>1위 행 수</a:t>
+              <a:t>Iceberg 표</a:t>
             </a:r>
           </a:p>
         </p:txBody>
@@ -14251,7 +14077,7 @@
                 <a:ea typeface="Pretendard"/>
                 <a:cs typeface="Pretendard"/>
               </a:rPr>
-              <a:t>날짜 수</a:t>
+              <a:t>크기를 알아</a:t>
             </a:r>
           </a:p>
           <a:p>
@@ -14269,7 +14095,7 @@
                 <a:ea typeface="Pretendard"/>
                 <a:cs typeface="Pretendard"/>
               </a:rPr>
-              <a:t>만큼</a:t>
+              <a:t>힌트 없이</a:t>
             </a:r>
           </a:p>
         </p:txBody>
@@ -14282,14 +14108,14 @@
         </p:nvSpPr>
         <p:spPr>
           <a:xfrm>
-            <a:off x="1143000" y="8058150"/>
-            <a:ext cx="16002000" cy="9525"/>
-          </a:xfrm>
-          <a:prstGeom prst="rect">
-            <a:avLst/>
-          </a:prstGeom>
-          <a:solidFill>
-            <a:srgbClr val="DCE1E8"/>
+            <a:off x="1143000" y="7581900"/>
+            <a:ext cx="38100" cy="323850"/>
+          </a:xfrm>
+          <a:prstGeom prst="rect">
+            <a:avLst/>
+          </a:prstGeom>
+          <a:solidFill>
+            <a:srgbClr val="BFD3F5"/>
           </a:solidFill>
           <a:ln>
             <a:noFill/>
@@ -14312,6 +14138,77 @@
         </p:nvSpPr>
         <p:spPr>
           <a:xfrm>
+            <a:off x="1314450" y="7581900"/>
+            <a:ext cx="15830550" cy="342900"/>
+          </a:xfrm>
+          <a:prstGeom prst="rect">
+            <a:avLst/>
+          </a:prstGeom>
+          <a:noFill/>
+        </p:spPr>
+        <p:txBody>
+          <a:bodyPr wrap="square" lIns="0" rIns="0" tIns="0" bIns="0" anchor="t">
+            <a:spAutoFit/>
+          </a:bodyPr>
+          <a:lstStyle/>
+          <a:p>
+            <a:pPr algn="l">
+              <a:lnSpc>
+                <a:spcPct val="100000"/>
+              </a:lnSpc>
+            </a:pPr>
+            <a:r>
+              <a:rPr sz="1725" b="1">
+                <a:solidFill>
+                  <a:srgbClr val="7D7D7D"/>
+                </a:solidFill>
+                <a:latin typeface="Pretendard"/>
+                <a:ea typeface="Pretendard"/>
+                <a:cs typeface="Pretendard"/>
+              </a:rPr>
+              <a:t>lake.db.orders 는 144 바이트로 계산 — 힌트 없이 Broadcast. explain 결과가 SortMergeJoin 으로 같게 나왔나요?</a:t>
+            </a:r>
+          </a:p>
+        </p:txBody>
+      </p:sp>
+      <p:sp>
+        <p:nvSpPr>
+          <p:cNvPr id="28" name="Rectangle 27"/>
+          <p:cNvSpPr/>
+          <p:nvPr/>
+        </p:nvSpPr>
+        <p:spPr>
+          <a:xfrm>
+            <a:off x="1143000" y="8058150"/>
+            <a:ext cx="16002000" cy="9525"/>
+          </a:xfrm>
+          <a:prstGeom prst="rect">
+            <a:avLst/>
+          </a:prstGeom>
+          <a:solidFill>
+            <a:srgbClr val="DCE1E8"/>
+          </a:solidFill>
+          <a:ln>
+            <a:noFill/>
+          </a:ln>
+          <a:effectLst/>
+        </p:spPr>
+        <p:txBody>
+          <a:bodyPr rtlCol="0" anchor="ctr" wrap="square"/>
+          <a:lstStyle/>
+          <a:p>
+            <a:pPr algn="ctr"/>
+          </a:p>
+        </p:txBody>
+      </p:sp>
+      <p:sp>
+        <p:nvSpPr>
+          <p:cNvPr id="29" name="TextBox 28"/>
+          <p:cNvSpPr txBox="1"/>
+          <p:nvPr/>
+        </p:nvSpPr>
+        <p:spPr>
+          <a:xfrm>
             <a:off x="1143000" y="8248650"/>
             <a:ext cx="13335000" cy="323850"/>
           </a:xfrm>
@@ -14347,7 +14244,7 @@
       </p:sp>
       <p:sp>
         <p:nvSpPr>
-          <p:cNvPr id="28" name="TextBox 27"/>
+          <p:cNvPr id="30" name="TextBox 29"/>
           <p:cNvSpPr txBox="1"/>
           <p:nvPr/>
         </p:nvSpPr>
